--- a/Практика/Блок 14.pptx
+++ b/Практика/Блок 14.pptx
@@ -4,6 +4,9 @@
   <p:sldMasterIdLst>
     <p:sldMasterId id="2147483648" r:id="rId1"/>
   </p:sldMasterIdLst>
+  <p:notesMasterIdLst>
+    <p:notesMasterId r:id="rId12"/>
+  </p:notesMasterIdLst>
   <p:sldIdLst>
     <p:sldId id="256" r:id="rId2"/>
     <p:sldId id="257" r:id="rId3"/>
@@ -16,9 +19,6 @@
     <p:sldId id="264" r:id="rId10"/>
     <p:sldId id="265" r:id="rId11"/>
   </p:sldIdLst>
-  <p:notesMasterIdLst>
-    <p:notesMasterId r:id="rId12"/>
-  </p:notesMasterIdLst>
   <p:sldSz cx="12192000" cy="6858000"/>
   <p:notesSz cx="6858000" cy="12192000"/>
   <p:defaultTextStyle>
@@ -113,6 +113,11 @@
       </a:defRPr>
     </a:lvl9pPr>
   </p:defaultTextStyle>
+  <p:extLst>
+    <p:ext uri="{EFAFB233-063F-42B5-8137-9DF3F51BA10A}">
+      <p15:sldGuideLst xmlns:p15="http://schemas.microsoft.com/office/powerpoint/2012/main"/>
+    </p:ext>
+  </p:extLst>
 </p:presentation>
 </file>
 
@@ -138,234 +143,10 @@
           <a:chExt cx="0" cy="0"/>
         </a:xfrm>
       </p:grpSpPr>
-      <p:sp>
-        <p:nvSpPr>
-          <p:cNvPr id="2" name="Header Placeholder 1"/>
-          <p:cNvSpPr>
-            <a:spLocks noGrp="1"/>
-          </p:cNvSpPr>
-          <p:nvPr>
-            <p:ph type="hdr" sz="quarter"/>
-          </p:nvPr>
-        </p:nvSpPr>
-        <p:spPr>
-          <a:xfrm>
-            <a:off x="0" y="0"/>
-            <a:ext cx="2971800" cy="458788"/>
-          </a:xfrm>
-          <a:prstGeom prst="rect">
-            <a:avLst/>
-          </a:prstGeom>
-        </p:spPr>
-        <p:txBody>
-          <a:bodyPr vert="horz" lIns="91440" tIns="45720" rIns="91440" bIns="45720" rtlCol="0"/>
-          <a:lstStyle>
-            <a:lvl1pPr algn="l">
-              <a:defRPr sz="1200"/>
-            </a:lvl1pPr>
-          </a:lstStyle>
-          <a:p>
-            <a:endParaRPr lang="en-US"/>
-          </a:p>
-        </p:txBody>
-      </p:sp>
-      <p:sp>
-        <p:nvSpPr>
-          <p:cNvPr id="3" name="Date Placeholder 2"/>
-          <p:cNvSpPr>
-            <a:spLocks noGrp="1"/>
-          </p:cNvSpPr>
-          <p:nvPr>
-            <p:ph type="dt" idx="1"/>
-          </p:nvPr>
-        </p:nvSpPr>
-        <p:spPr>
-          <a:xfrm>
-            <a:off x="3884613" y="0"/>
-            <a:ext cx="2971800" cy="458788"/>
-          </a:xfrm>
-          <a:prstGeom prst="rect">
-            <a:avLst/>
-          </a:prstGeom>
-        </p:spPr>
-        <p:txBody>
-          <a:bodyPr vert="horz" lIns="91440" tIns="45720" rIns="91440" bIns="45720" rtlCol="0"/>
-          <a:lstStyle>
-            <a:lvl1pPr algn="r">
-              <a:defRPr sz="1200"/>
-            </a:lvl1pPr>
-          </a:lstStyle>
-          <a:p>
-            <a:fld id="{5282F153-3F37-0F45-9E97-73ACFA13230C}" type="datetimeFigureOut">
-              <a:rPr lang="en-US"/>
-              <a:t>7/23/19</a:t>
-            </a:fld>
-            <a:endParaRPr lang="en-US"/>
-          </a:p>
-        </p:txBody>
-      </p:sp>
-      <p:sp>
-        <p:nvSpPr>
-          <p:cNvPr id="4" name="Slide Image Placeholder 3"/>
-          <p:cNvSpPr>
-            <a:spLocks noGrp="1" noRot="1" noChangeAspect="1"/>
-          </p:cNvSpPr>
-          <p:nvPr>
-            <p:ph type="sldImg" idx="2"/>
-          </p:nvPr>
-        </p:nvSpPr>
-        <p:spPr>
-          <a:xfrm>
-            <a:off x="685800" y="1143000"/>
-            <a:ext cx="5486400" cy="3086100"/>
-          </a:xfrm>
-          <a:prstGeom prst="rect">
-            <a:avLst/>
-          </a:prstGeom>
-          <a:noFill/>
-          <a:ln w="12700">
-            <a:solidFill>
-              <a:prstClr val="black"/>
-            </a:solidFill>
-          </a:ln>
-        </p:spPr>
-        <p:txBody>
-          <a:bodyPr vert="horz" lIns="91440" tIns="45720" rIns="91440" bIns="45720" rtlCol="0" anchor="ctr"/>
-          <a:lstStyle/>
-          <a:p>
-            <a:endParaRPr lang="en-US"/>
-          </a:p>
-        </p:txBody>
-      </p:sp>
-      <p:sp>
-        <p:nvSpPr>
-          <p:cNvPr id="5" name="Notes Placeholder 4"/>
-          <p:cNvSpPr>
-            <a:spLocks noGrp="1"/>
-          </p:cNvSpPr>
-          <p:nvPr>
-            <p:ph type="body" sz="quarter" idx="3"/>
-          </p:nvPr>
-        </p:nvSpPr>
-        <p:spPr>
-          <a:xfrm>
-            <a:off x="685800" y="4400550"/>
-            <a:ext cx="5486400" cy="3600450"/>
-          </a:xfrm>
-          <a:prstGeom prst="rect">
-            <a:avLst/>
-          </a:prstGeom>
-        </p:spPr>
-        <p:txBody>
-          <a:bodyPr vert="horz" lIns="91440" tIns="45720" rIns="91440" bIns="45720" rtlCol="0"/>
-          <a:lstStyle/>
-          <a:p>
-            <a:pPr lvl="0"/>
-            <a:r>
-              <a:rPr lang="en-US"/>
-              <a:t>Click to edit Master text styles</a:t>
-            </a:r>
-          </a:p>
-          <a:p>
-            <a:pPr lvl="1"/>
-            <a:r>
-              <a:rPr lang="en-US"/>
-              <a:t>Second level</a:t>
-            </a:r>
-          </a:p>
-          <a:p>
-            <a:pPr lvl="2"/>
-            <a:r>
-              <a:rPr lang="en-US"/>
-              <a:t>Third level</a:t>
-            </a:r>
-          </a:p>
-          <a:p>
-            <a:pPr lvl="3"/>
-            <a:r>
-              <a:rPr lang="en-US"/>
-              <a:t>Fourth level</a:t>
-            </a:r>
-          </a:p>
-          <a:p>
-            <a:pPr lvl="4"/>
-            <a:r>
-              <a:rPr lang="en-US"/>
-              <a:t>Fifth level</a:t>
-            </a:r>
-          </a:p>
-        </p:txBody>
-      </p:sp>
-      <p:sp>
-        <p:nvSpPr>
-          <p:cNvPr id="6" name="Footer Placeholder 5"/>
-          <p:cNvSpPr>
-            <a:spLocks noGrp="1"/>
-          </p:cNvSpPr>
-          <p:nvPr>
-            <p:ph type="ftr" sz="quarter" idx="4"/>
-          </p:nvPr>
-        </p:nvSpPr>
-        <p:spPr>
-          <a:xfrm>
-            <a:off x="0" y="8685213"/>
-            <a:ext cx="2971800" cy="458787"/>
-          </a:xfrm>
-          <a:prstGeom prst="rect">
-            <a:avLst/>
-          </a:prstGeom>
-        </p:spPr>
-        <p:txBody>
-          <a:bodyPr vert="horz" lIns="91440" tIns="45720" rIns="91440" bIns="45720" rtlCol="0" anchor="b"/>
-          <a:lstStyle>
-            <a:lvl1pPr algn="l">
-              <a:defRPr sz="1200"/>
-            </a:lvl1pPr>
-          </a:lstStyle>
-          <a:p>
-            <a:endParaRPr lang="en-US"/>
-          </a:p>
-        </p:txBody>
-      </p:sp>
-      <p:sp>
-        <p:nvSpPr>
-          <p:cNvPr id="7" name="Slide Number Placeholder 6"/>
-          <p:cNvSpPr>
-            <a:spLocks noGrp="1"/>
-          </p:cNvSpPr>
-          <p:nvPr>
-            <p:ph type="sldNum" sz="quarter" idx="5"/>
-          </p:nvPr>
-        </p:nvSpPr>
-        <p:spPr>
-          <a:xfrm>
-            <a:off x="3884613" y="8685213"/>
-            <a:ext cx="2971800" cy="458787"/>
-          </a:xfrm>
-          <a:prstGeom prst="rect">
-            <a:avLst/>
-          </a:prstGeom>
-        </p:spPr>
-        <p:txBody>
-          <a:bodyPr vert="horz" lIns="91440" tIns="45720" rIns="91440" bIns="45720" rtlCol="0" anchor="b"/>
-          <a:lstStyle>
-            <a:lvl1pPr algn="r">
-              <a:defRPr sz="1200"/>
-            </a:lvl1pPr>
-          </a:lstStyle>
-          <a:p>
-            <a:fld id="{CE5E9CC1-C706-0F49-92D6-E571CC5EEA8F}" type="slidenum">
-              <a:rPr lang="en-US"/>
-              <a:t>‹#›</a:t>
-            </a:fld>
-            <a:endParaRPr lang="en-US"/>
-          </a:p>
-        </p:txBody>
-      </p:sp>
     </p:spTree>
     <p:extLst>
       <p:ext uri="{BB962C8B-B14F-4D97-AF65-F5344CB8AC3E}">
-        <p14:creationId xmlns:p14="http://schemas.microsoft.com/office/powerpoint/2010/main" val="1024086991"/>
+        <p14:creationId xmlns:p14="http://schemas.microsoft.com/office/powerpoint/2010/main" val="2547059787"/>
       </p:ext>
     </p:extLst>
   </p:cSld>
@@ -509,10 +290,6 @@
           <a:bodyPr/>
           <a:lstStyle/>
           <a:p>
-            <a:r>
-              <a:rPr lang="en-US" dirty="0"/>
-              <a:t/>
-            </a:r>
             <a:endParaRPr lang="en-US" dirty="0"/>
           </a:p>
         </p:txBody>
@@ -597,10 +374,6 @@
           <a:bodyPr/>
           <a:lstStyle/>
           <a:p>
-            <a:r>
-              <a:rPr lang="en-US" dirty="0"/>
-              <a:t/>
-            </a:r>
             <a:endParaRPr lang="en-US" dirty="0"/>
           </a:p>
         </p:txBody>
@@ -685,10 +458,6 @@
           <a:bodyPr/>
           <a:lstStyle/>
           <a:p>
-            <a:r>
-              <a:rPr lang="en-US" dirty="0"/>
-              <a:t/>
-            </a:r>
             <a:endParaRPr lang="en-US" dirty="0"/>
           </a:p>
         </p:txBody>
@@ -773,10 +542,6 @@
           <a:bodyPr/>
           <a:lstStyle/>
           <a:p>
-            <a:r>
-              <a:rPr lang="en-US" dirty="0"/>
-              <a:t/>
-            </a:r>
             <a:endParaRPr lang="en-US" dirty="0"/>
           </a:p>
         </p:txBody>
@@ -861,10 +626,6 @@
           <a:bodyPr/>
           <a:lstStyle/>
           <a:p>
-            <a:r>
-              <a:rPr lang="en-US" dirty="0"/>
-              <a:t/>
-            </a:r>
             <a:endParaRPr lang="en-US" dirty="0"/>
           </a:p>
         </p:txBody>
@@ -949,10 +710,6 @@
           <a:bodyPr/>
           <a:lstStyle/>
           <a:p>
-            <a:r>
-              <a:rPr lang="en-US" dirty="0"/>
-              <a:t/>
-            </a:r>
             <a:endParaRPr lang="en-US" dirty="0"/>
           </a:p>
         </p:txBody>
@@ -1037,10 +794,6 @@
           <a:bodyPr/>
           <a:lstStyle/>
           <a:p>
-            <a:r>
-              <a:rPr lang="en-US" dirty="0"/>
-              <a:t/>
-            </a:r>
             <a:endParaRPr lang="en-US" dirty="0"/>
           </a:p>
         </p:txBody>
@@ -1125,10 +878,6 @@
           <a:bodyPr/>
           <a:lstStyle/>
           <a:p>
-            <a:r>
-              <a:rPr lang="en-US" dirty="0"/>
-              <a:t/>
-            </a:r>
             <a:endParaRPr lang="en-US" dirty="0"/>
           </a:p>
         </p:txBody>
@@ -1213,10 +962,6 @@
           <a:bodyPr/>
           <a:lstStyle/>
           <a:p>
-            <a:r>
-              <a:rPr lang="en-US" dirty="0"/>
-              <a:t/>
-            </a:r>
             <a:endParaRPr lang="en-US" dirty="0"/>
           </a:p>
         </p:txBody>
@@ -1301,10 +1046,6 @@
           <a:bodyPr/>
           <a:lstStyle/>
           <a:p>
-            <a:r>
-              <a:rPr lang="en-US" dirty="0"/>
-              <a:t/>
-            </a:r>
             <a:endParaRPr lang="en-US" dirty="0"/>
           </a:p>
         </p:txBody>
@@ -1378,6 +1119,11 @@
 <file path=ppt/slideMasters/slideMaster1.xml><?xml version="1.0" encoding="utf-8"?>
 <p:sldMaster xmlns:a="http://schemas.openxmlformats.org/drawingml/2006/main" xmlns:r="http://schemas.openxmlformats.org/officeDocument/2006/relationships" xmlns:p="http://schemas.openxmlformats.org/presentationml/2006/main">
   <p:cSld>
+    <p:bg>
+      <p:bgRef idx="1001">
+        <a:schemeClr val="bg1"/>
+      </p:bgRef>
+    </p:bg>
     <p:spTree>
       <p:nvGrpSpPr>
         <p:cNvPr id="1" name=""/>
@@ -1660,6 +1406,7 @@
         <a:solidFill>
           <a:srgbClr val="111C33"/>
         </a:solidFill>
+        <a:effectLst/>
       </p:bgPr>
     </p:bg>
     <p:spTree>
@@ -1717,20 +1464,9 @@
           <a:bodyPr wrap="square" rtlCol="0" anchor="ctr"/>
           <a:lstStyle/>
           <a:p>
-            <a:pPr indent="0" marL="0">
+            <a:pPr marL="0" indent="0">
               <a:buNone/>
             </a:pPr>
-            <a:r>
-              <a:rPr lang="en-US" sz="1400" i="1" dirty="0">
-                <a:solidFill>
-                  <a:srgbClr val="C9A24B"/>
-                </a:solidFill>
-                <a:latin typeface="Calibri" pitchFamily="34" charset="0"/>
-                <a:ea typeface="Calibri" pitchFamily="34" charset="-122"/>
-                <a:cs typeface="Calibri" pitchFamily="34" charset="-120"/>
-              </a:rPr>
-              <a:t>[ЛОГОТИП КОМПАНИИ]</a:t>
-            </a:r>
             <a:endParaRPr lang="en-US" sz="1400" dirty="0"/>
           </a:p>
         </p:txBody>
@@ -1756,7 +1492,7 @@
           <a:bodyPr wrap="square" rtlCol="0" anchor="ctr"/>
           <a:lstStyle/>
           <a:p>
-            <a:pPr indent="0" marL="0">
+            <a:pPr marL="0" indent="0">
               <a:buNone/>
             </a:pPr>
             <a:r>
@@ -1795,9 +1531,20 @@
           <a:bodyPr wrap="square" rtlCol="0" anchor="ctr"/>
           <a:lstStyle/>
           <a:p>
-            <a:pPr indent="0" marL="0">
+            <a:pPr marL="0" indent="0">
               <a:buNone/>
             </a:pPr>
+            <a:r>
+              <a:rPr lang="en-US" sz="2000" dirty="0" err="1">
+                <a:solidFill>
+                  <a:srgbClr val="D8DEEA"/>
+                </a:solidFill>
+                <a:latin typeface="Calibri" pitchFamily="34" charset="0"/>
+                <a:ea typeface="Calibri" pitchFamily="34" charset="-122"/>
+                <a:cs typeface="Calibri" pitchFamily="34" charset="-120"/>
+              </a:rPr>
+              <a:t>Презентация</a:t>
+            </a:r>
             <a:r>
               <a:rPr lang="en-US" sz="2000" dirty="0">
                 <a:solidFill>
@@ -1807,7 +1554,29 @@
                 <a:ea typeface="Calibri" pitchFamily="34" charset="-122"/>
                 <a:cs typeface="Calibri" pitchFamily="34" charset="-120"/>
               </a:rPr>
-              <a:t>Презентация компании для Заказчика</a:t>
+              <a:t> </a:t>
+            </a:r>
+            <a:r>
+              <a:rPr lang="en-US" sz="2000" dirty="0" err="1">
+                <a:solidFill>
+                  <a:srgbClr val="D8DEEA"/>
+                </a:solidFill>
+                <a:latin typeface="Calibri" pitchFamily="34" charset="0"/>
+                <a:ea typeface="Calibri" pitchFamily="34" charset="-122"/>
+                <a:cs typeface="Calibri" pitchFamily="34" charset="-120"/>
+              </a:rPr>
+              <a:t>компани</a:t>
+            </a:r>
+            <a:r>
+              <a:rPr lang="ru-RU" sz="2000" dirty="0">
+                <a:solidFill>
+                  <a:srgbClr val="D8DEEA"/>
+                </a:solidFill>
+                <a:latin typeface="Calibri" pitchFamily="34" charset="0"/>
+                <a:ea typeface="Calibri" pitchFamily="34" charset="-122"/>
+                <a:cs typeface="Calibri" pitchFamily="34" charset="-120"/>
+              </a:rPr>
+              <a:t>и</a:t>
             </a:r>
             <a:endParaRPr lang="en-US" sz="2000" dirty="0"/>
           </a:p>
@@ -1815,14 +1584,14 @@
       </p:sp>
       <p:sp>
         <p:nvSpPr>
-          <p:cNvPr id="6" name="Text 4"/>
-          <p:cNvSpPr/>
-          <p:nvPr/>
-        </p:nvSpPr>
-        <p:spPr>
-          <a:xfrm>
-            <a:off x="822960" y="6035040"/>
-            <a:ext cx="9144000" cy="365760"/>
+          <p:cNvPr id="7" name="Text 5"/>
+          <p:cNvSpPr/>
+          <p:nvPr/>
+        </p:nvSpPr>
+        <p:spPr>
+          <a:xfrm>
+            <a:off x="822960" y="6355080"/>
+            <a:ext cx="9144000" cy="320040"/>
           </a:xfrm>
           <a:prstGeom prst="rect">
             <a:avLst/>
@@ -1834,11 +1603,11 @@
           <a:bodyPr wrap="square" rtlCol="0" anchor="ctr"/>
           <a:lstStyle/>
           <a:p>
-            <a:pPr indent="0" marL="0">
+            <a:pPr marL="0" indent="0">
               <a:buNone/>
             </a:pPr>
             <a:r>
-              <a:rPr lang="en-US" sz="1200" dirty="0">
+              <a:rPr lang="ru-RU" sz="1200" i="1" dirty="0">
                 <a:solidFill>
                   <a:srgbClr val="6B7280"/>
                 </a:solidFill>
@@ -1846,51 +1615,41 @@
                 <a:ea typeface="Calibri" pitchFamily="34" charset="-122"/>
                 <a:cs typeface="Calibri" pitchFamily="34" charset="-120"/>
               </a:rPr>
-              <a:t>Задание 12.1 · Блок 12. Как устроена ГК «Сатори Консалтинг»</a:t>
+              <a:t>Выполнил Шмидт Антон Владиславович</a:t>
             </a:r>
             <a:endParaRPr lang="en-US" sz="1200" dirty="0"/>
           </a:p>
         </p:txBody>
       </p:sp>
-      <p:sp>
-        <p:nvSpPr>
-          <p:cNvPr id="7" name="Text 5"/>
-          <p:cNvSpPr/>
-          <p:nvPr/>
-        </p:nvSpPr>
-        <p:spPr>
-          <a:xfrm>
-            <a:off x="822960" y="6355080"/>
-            <a:ext cx="9144000" cy="320040"/>
-          </a:xfrm>
-          <a:prstGeom prst="rect">
-            <a:avLst/>
-          </a:prstGeom>
-          <a:noFill/>
-          <a:ln/>
-        </p:spPr>
-        <p:txBody>
-          <a:bodyPr wrap="square" rtlCol="0" anchor="ctr"/>
-          <a:lstStyle/>
-          <a:p>
-            <a:pPr indent="0" marL="0">
-              <a:buNone/>
-            </a:pPr>
-            <a:r>
-              <a:rPr lang="en-US" sz="1200" i="1" dirty="0">
-                <a:solidFill>
-                  <a:srgbClr val="6B7280"/>
-                </a:solidFill>
-                <a:latin typeface="Calibri" pitchFamily="34" charset="0"/>
-                <a:ea typeface="Calibri" pitchFamily="34" charset="-122"/>
-                <a:cs typeface="Calibri" pitchFamily="34" charset="-120"/>
-              </a:rPr>
-              <a:t>[Ваше ФИО] · [Дата]</a:t>
-            </a:r>
-            <a:endParaRPr lang="en-US" sz="1200" dirty="0"/>
-          </a:p>
-        </p:txBody>
-      </p:sp>
+      <p:pic>
+        <p:nvPicPr>
+          <p:cNvPr id="9" name="Рисунок 8" descr="Изображение выглядит как круг, Красочность&#10;&#10;Контент, сгенерированный ИИ, может содержать ошибки.">
+            <a:extLst>
+              <a:ext uri="{FF2B5EF4-FFF2-40B4-BE49-F238E27FC236}">
+                <a16:creationId xmlns:a16="http://schemas.microsoft.com/office/drawing/2014/main" id="{7461A24B-22FB-A70C-461F-2BD473D776A0}"/>
+              </a:ext>
+            </a:extLst>
+          </p:cNvPr>
+          <p:cNvPicPr>
+            <a:picLocks noChangeAspect="1"/>
+          </p:cNvPicPr>
+          <p:nvPr/>
+        </p:nvPicPr>
+        <p:blipFill>
+          <a:blip r:embed="rId3"/>
+          <a:srcRect r="1596"/>
+          <a:stretch/>
+        </p:blipFill>
+        <p:spPr>
+          <a:xfrm>
+            <a:off x="822960" y="738102"/>
+            <a:ext cx="2023403" cy="2088357"/>
+          </a:xfrm>
+          <a:prstGeom prst="rect">
+            <a:avLst/>
+          </a:prstGeom>
+        </p:spPr>
+      </p:pic>
     </p:spTree>
   </p:cSld>
   <p:clrMapOvr>
@@ -1907,6 +1666,7 @@
         <a:solidFill>
           <a:srgbClr val="111C33"/>
         </a:solidFill>
+        <a:effectLst/>
       </p:bgPr>
     </p:bg>
     <p:spTree>
@@ -1951,7 +1711,7 @@
         </p:nvSpPr>
         <p:spPr>
           <a:xfrm>
-            <a:off x="822960" y="2743200"/>
+            <a:off x="822960" y="2368296"/>
             <a:ext cx="10515600" cy="822960"/>
           </a:xfrm>
           <a:prstGeom prst="rect">
@@ -1964,7 +1724,7 @@
           <a:bodyPr wrap="square" rtlCol="0" anchor="ctr"/>
           <a:lstStyle/>
           <a:p>
-            <a:pPr indent="0" marL="0">
+            <a:pPr marL="0" indent="0">
               <a:buNone/>
             </a:pPr>
             <a:r>
@@ -2003,7 +1763,7 @@
           <a:bodyPr wrap="square" rtlCol="0" anchor="ctr"/>
           <a:lstStyle/>
           <a:p>
-            <a:pPr indent="0" marL="0">
+            <a:pPr marL="0" indent="0">
               <a:buNone/>
             </a:pPr>
             <a:r>
@@ -2015,7 +1775,7 @@
                 <a:ea typeface="Calibri" pitchFamily="34" charset="-122"/>
                 <a:cs typeface="Calibri" pitchFamily="34" charset="-120"/>
               </a:rPr>
-              <a:t>ГК «Сатори Консалтинг»  ·  [контактные данные / сайт: satoryomsk.ru]</a:t>
+              <a:t>ГК «Сатори Консалтинг»  ·  [satoryomsk.ru]</a:t>
             </a:r>
             <a:endParaRPr lang="en-US" sz="1400" dirty="0"/>
           </a:p>
@@ -2087,11 +1847,11 @@
           <a:bodyPr wrap="square" rtlCol="0" anchor="ctr"/>
           <a:lstStyle/>
           <a:p>
-            <a:pPr indent="0" marL="0">
+            <a:pPr marL="0" indent="0">
               <a:buNone/>
             </a:pPr>
             <a:r>
-              <a:rPr lang="en-US" sz="1100" b="1" spc="200" kern="0" dirty="0">
+              <a:rPr lang="en-US" sz="1100" b="1" kern="0" spc="200" dirty="0">
                 <a:solidFill>
                   <a:srgbClr val="C9A24B"/>
                 </a:solidFill>
@@ -2126,7 +1886,7 @@
           <a:bodyPr wrap="square" rtlCol="0" anchor="ctr"/>
           <a:lstStyle/>
           <a:p>
-            <a:pPr indent="0" marL="0">
+            <a:pPr marL="0" indent="0">
               <a:buNone/>
             </a:pPr>
             <a:r>
@@ -2152,8 +1912,8 @@
         </p:nvSpPr>
         <p:spPr>
           <a:xfrm>
-            <a:off x="457200" y="1280160"/>
-            <a:ext cx="11247120" cy="548640"/>
+            <a:off x="457200" y="1161288"/>
+            <a:ext cx="11247120" cy="667512"/>
           </a:xfrm>
           <a:prstGeom prst="rect">
             <a:avLst/>
@@ -2165,11 +1925,11 @@
           <a:bodyPr wrap="square" rtlCol="0" anchor="ctr"/>
           <a:lstStyle/>
           <a:p>
-            <a:pPr indent="0" marL="0">
+            <a:pPr marL="0" indent="0">
               <a:buNone/>
             </a:pPr>
             <a:r>
-              <a:rPr lang="en-US" sz="1400" i="1" dirty="0">
+              <a:rPr lang="en-US" sz="2000" i="1" dirty="0" err="1">
                 <a:solidFill>
                   <a:srgbClr val="1B2A4A"/>
                 </a:solidFill>
@@ -2177,9 +1937,20 @@
                 <a:ea typeface="Calibri" pitchFamily="34" charset="-122"/>
                 <a:cs typeface="Calibri" pitchFamily="34" charset="-120"/>
               </a:rPr>
-              <a:t>Задача 1a. Объясните, почему на сайте компании указано «ГК «Сатори Консалтинг»», а в дневниках практики ОмГТУ — «ООО «Сатори Партнер»».</a:t>
-            </a:r>
-            <a:endParaRPr lang="en-US" sz="1400" dirty="0"/>
+              <a:t>Объясните</a:t>
+            </a:r>
+            <a:r>
+              <a:rPr lang="en-US" sz="2000" i="1" dirty="0">
+                <a:solidFill>
+                  <a:srgbClr val="1B2A4A"/>
+                </a:solidFill>
+                <a:latin typeface="Calibri" pitchFamily="34" charset="0"/>
+                <a:ea typeface="Calibri" pitchFamily="34" charset="-122"/>
+                <a:cs typeface="Calibri" pitchFamily="34" charset="-120"/>
+              </a:rPr>
+              <a:t>, почему на сайте компании указано «ГК «Сатори Консалтинг»», а в дневниках практики ОмГТУ — «ООО «Сатори Партнер»».</a:t>
+            </a:r>
+            <a:endParaRPr lang="en-US" sz="2000" dirty="0"/>
           </a:p>
         </p:txBody>
       </p:sp>
@@ -2216,8 +1987,8 @@
         </p:nvSpPr>
         <p:spPr>
           <a:xfrm>
-            <a:off x="822960" y="2194560"/>
-            <a:ext cx="10515600" cy="3657600"/>
+            <a:off x="822960" y="2281311"/>
+            <a:ext cx="10515600" cy="1899138"/>
           </a:xfrm>
           <a:prstGeom prst="rect">
             <a:avLst/>
@@ -2229,21 +2000,40 @@
           <a:bodyPr wrap="square" rtlCol="0" anchor="t"/>
           <a:lstStyle/>
           <a:p>
-            <a:pPr indent="0" marL="0">
-              <a:buNone/>
+            <a:r>
+              <a:rPr lang="ru-RU" sz="2000" dirty="0"/>
+              <a:t>ГК «Сатори Консалтинг» включает в себя 3 юридических лица:</a:t>
+            </a:r>
+          </a:p>
+          <a:p>
+            <a:pPr marL="285750" indent="-285750">
+              <a:buFont typeface="Arial" panose="020B0604020202020204" pitchFamily="34" charset="0"/>
+              <a:buChar char="•"/>
             </a:pPr>
             <a:r>
-              <a:rPr lang="en-US" sz="1600" i="1" dirty="0">
-                <a:solidFill>
-                  <a:srgbClr val="6B7280"/>
-                </a:solidFill>
-                <a:latin typeface="Calibri" pitchFamily="34" charset="0"/>
-                <a:ea typeface="Calibri" pitchFamily="34" charset="-122"/>
-                <a:cs typeface="Calibri" pitchFamily="34" charset="-120"/>
-              </a:rPr>
-              <a:t>[Ваш ответ: соотношение группы компаний (ГК) и юридического лица (ООО), входящего в её состав]</a:t>
-            </a:r>
-            <a:endParaRPr lang="en-US" sz="1600" dirty="0"/>
+              <a:rPr lang="ru-RU" sz="2000" dirty="0"/>
+              <a:t>ООО «Сатори Консалтинг» - носитель бренда;</a:t>
+            </a:r>
+          </a:p>
+          <a:p>
+            <a:pPr marL="285750" indent="-285750">
+              <a:buFont typeface="Arial" panose="020B0604020202020204" pitchFamily="34" charset="0"/>
+              <a:buChar char="•"/>
+            </a:pPr>
+            <a:r>
+              <a:rPr lang="ru-RU" sz="2000" dirty="0"/>
+              <a:t>ООО «Сатори Консалтинг М» - московский филиал компании;</a:t>
+            </a:r>
+          </a:p>
+          <a:p>
+            <a:pPr marL="285750" indent="-285750">
+              <a:buFont typeface="Arial" panose="020B0604020202020204" pitchFamily="34" charset="0"/>
+              <a:buChar char="•"/>
+            </a:pPr>
+            <a:r>
+              <a:rPr lang="ru-RU" sz="2000" dirty="0"/>
+              <a:t>ООО «Сатори Партнер» - основная компания.</a:t>
+            </a:r>
           </a:p>
         </p:txBody>
       </p:sp>
@@ -2268,7 +2058,7 @@
           <a:bodyPr wrap="square" rtlCol="0" anchor="ctr"/>
           <a:lstStyle/>
           <a:p>
-            <a:pPr indent="0" marL="0">
+            <a:pPr marL="0" indent="0">
               <a:buNone/>
             </a:pPr>
             <a:r>
@@ -2307,7 +2097,7 @@
           <a:bodyPr wrap="square" rtlCol="0" anchor="ctr"/>
           <a:lstStyle/>
           <a:p>
-            <a:pPr algn="r" indent="0" marL="0">
+            <a:pPr marL="0" indent="0" algn="r">
               <a:buNone/>
             </a:pPr>
             <a:r>
@@ -2391,11 +2181,11 @@
           <a:bodyPr wrap="square" rtlCol="0" anchor="ctr"/>
           <a:lstStyle/>
           <a:p>
-            <a:pPr indent="0" marL="0">
+            <a:pPr marL="0" indent="0">
               <a:buNone/>
             </a:pPr>
             <a:r>
-              <a:rPr lang="en-US" sz="1100" b="1" spc="200" kern="0" dirty="0">
+              <a:rPr lang="en-US" sz="1100" b="1" kern="0" spc="200" dirty="0">
                 <a:solidFill>
                   <a:srgbClr val="C9A24B"/>
                 </a:solidFill>
@@ -2430,7 +2220,7 @@
           <a:bodyPr wrap="square" rtlCol="0" anchor="ctr"/>
           <a:lstStyle/>
           <a:p>
-            <a:pPr indent="0" marL="0">
+            <a:pPr marL="0" indent="0">
               <a:buNone/>
             </a:pPr>
             <a:r>
@@ -2450,46 +2240,7 @@
       </p:sp>
       <p:sp>
         <p:nvSpPr>
-          <p:cNvPr id="5" name="Text 3"/>
-          <p:cNvSpPr/>
-          <p:nvPr/>
-        </p:nvSpPr>
-        <p:spPr>
-          <a:xfrm>
-            <a:off x="457200" y="1280160"/>
-            <a:ext cx="11247120" cy="365760"/>
-          </a:xfrm>
-          <a:prstGeom prst="rect">
-            <a:avLst/>
-          </a:prstGeom>
-          <a:noFill/>
-          <a:ln/>
-        </p:spPr>
-        <p:txBody>
-          <a:bodyPr wrap="square" rtlCol="0" anchor="ctr"/>
-          <a:lstStyle/>
-          <a:p>
-            <a:pPr indent="0" marL="0">
-              <a:buNone/>
-            </a:pPr>
-            <a:r>
-              <a:rPr lang="en-US" sz="1300" i="1" dirty="0">
-                <a:solidFill>
-                  <a:srgbClr val="1B2A4A"/>
-                </a:solidFill>
-                <a:latin typeface="Calibri" pitchFamily="34" charset="0"/>
-                <a:ea typeface="Calibri" pitchFamily="34" charset="-122"/>
-                <a:cs typeface="Calibri" pitchFamily="34" charset="-120"/>
-              </a:rPr>
-              <a:t>Задача 1b. Распределение названий подразделений (learningapps.org)</a:t>
-            </a:r>
-            <a:endParaRPr lang="en-US" sz="1300" dirty="0"/>
-          </a:p>
-        </p:txBody>
-      </p:sp>
-      <p:sp>
-        <p:nvSpPr>
-          <p:cNvPr id="6" name="Shape 4"/>
+          <p:cNvPr id="7" name="Text 5"/>
           <p:cNvSpPr/>
           <p:nvPr/>
         </p:nvSpPr>
@@ -2501,31 +2252,6 @@
           <a:prstGeom prst="rect">
             <a:avLst/>
           </a:prstGeom>
-          <a:solidFill>
-            <a:srgbClr val="E8EAEE"/>
-          </a:solidFill>
-          <a:ln w="15875">
-            <a:solidFill>
-              <a:srgbClr val="AEB4C0"/>
-            </a:solidFill>
-            <a:prstDash val="dash"/>
-          </a:ln>
-        </p:spPr>
-      </p:sp>
-      <p:sp>
-        <p:nvSpPr>
-          <p:cNvPr id="7" name="Text 5"/>
-          <p:cNvSpPr/>
-          <p:nvPr/>
-        </p:nvSpPr>
-        <p:spPr>
-          <a:xfrm>
-            <a:off x="457200" y="1737360"/>
-            <a:ext cx="11247120" cy="4480560"/>
-          </a:xfrm>
-          <a:prstGeom prst="rect">
-            <a:avLst/>
-          </a:prstGeom>
           <a:noFill/>
           <a:ln/>
         </p:spPr>
@@ -2533,7 +2259,7 @@
           <a:bodyPr wrap="square" rtlCol="0" anchor="ctr"/>
           <a:lstStyle/>
           <a:p>
-            <a:pPr algn="ctr" indent="0" marL="0">
+            <a:pPr marL="0" indent="0" algn="ctr">
               <a:buNone/>
             </a:pPr>
             <a:r>
@@ -2547,9 +2273,6 @@
               </a:rPr>
               <a:t>🖼  </a:t>
             </a:r>
-            <a:pPr algn="ctr" indent="0" marL="0">
-              <a:buNone/>
-            </a:pPr>
             <a:r>
               <a:rPr lang="en-US" sz="1300" i="1" dirty="0">
                 <a:solidFill>
@@ -2586,7 +2309,7 @@
           <a:bodyPr wrap="square" rtlCol="0" anchor="ctr"/>
           <a:lstStyle/>
           <a:p>
-            <a:pPr indent="0" marL="0">
+            <a:pPr marL="0" indent="0">
               <a:buNone/>
             </a:pPr>
             <a:r>
@@ -2625,7 +2348,7 @@
           <a:bodyPr wrap="square" rtlCol="0" anchor="ctr"/>
           <a:lstStyle/>
           <a:p>
-            <a:pPr algn="r" indent="0" marL="0">
+            <a:pPr marL="0" indent="0" algn="r">
               <a:buNone/>
             </a:pPr>
             <a:r>
@@ -2643,6 +2366,36 @@
           </a:p>
         </p:txBody>
       </p:sp>
+      <p:pic>
+        <p:nvPicPr>
+          <p:cNvPr id="11" name="Рисунок 10">
+            <a:extLst>
+              <a:ext uri="{FF2B5EF4-FFF2-40B4-BE49-F238E27FC236}">
+                <a16:creationId xmlns:a16="http://schemas.microsoft.com/office/drawing/2014/main" id="{F3792F57-BEEB-C2C3-AB10-953F5BDF6674}"/>
+              </a:ext>
+            </a:extLst>
+          </p:cNvPr>
+          <p:cNvPicPr>
+            <a:picLocks noChangeAspect="1"/>
+          </p:cNvPicPr>
+          <p:nvPr/>
+        </p:nvPicPr>
+        <p:blipFill>
+          <a:blip r:embed="rId3"/>
+          <a:stretch>
+            <a:fillRect/>
+          </a:stretch>
+        </p:blipFill>
+        <p:spPr>
+          <a:xfrm>
+            <a:off x="441960" y="2343743"/>
+            <a:ext cx="11277600" cy="2777601"/>
+          </a:xfrm>
+          <a:prstGeom prst="rect">
+            <a:avLst/>
+          </a:prstGeom>
+        </p:spPr>
+      </p:pic>
     </p:spTree>
   </p:cSld>
   <p:clrMapOvr>
@@ -2709,11 +2462,11 @@
           <a:bodyPr wrap="square" rtlCol="0" anchor="ctr"/>
           <a:lstStyle/>
           <a:p>
-            <a:pPr indent="0" marL="0">
+            <a:pPr marL="0" indent="0">
               <a:buNone/>
             </a:pPr>
             <a:r>
-              <a:rPr lang="en-US" sz="1100" b="1" spc="200" kern="0" dirty="0">
+              <a:rPr lang="en-US" sz="1100" b="1" kern="0" spc="200" dirty="0">
                 <a:solidFill>
                   <a:srgbClr val="C9A24B"/>
                 </a:solidFill>
@@ -2748,7 +2501,7 @@
           <a:bodyPr wrap="square" rtlCol="0" anchor="ctr"/>
           <a:lstStyle/>
           <a:p>
-            <a:pPr indent="0" marL="0">
+            <a:pPr marL="0" indent="0">
               <a:buNone/>
             </a:pPr>
             <a:r>
@@ -2768,201 +2521,6 @@
       </p:sp>
       <p:sp>
         <p:nvSpPr>
-          <p:cNvPr id="5" name="Text 3"/>
-          <p:cNvSpPr/>
-          <p:nvPr/>
-        </p:nvSpPr>
-        <p:spPr>
-          <a:xfrm>
-            <a:off x="457200" y="1280160"/>
-            <a:ext cx="11247120" cy="365760"/>
-          </a:xfrm>
-          <a:prstGeom prst="rect">
-            <a:avLst/>
-          </a:prstGeom>
-          <a:noFill/>
-          <a:ln/>
-        </p:spPr>
-        <p:txBody>
-          <a:bodyPr wrap="square" rtlCol="0" anchor="ctr"/>
-          <a:lstStyle/>
-          <a:p>
-            <a:pPr indent="0" marL="0">
-              <a:buNone/>
-            </a:pPr>
-            <a:r>
-              <a:rPr lang="en-US" sz="1300" i="1" dirty="0">
-                <a:solidFill>
-                  <a:srgbClr val="1B2A4A"/>
-                </a:solidFill>
-                <a:latin typeface="Calibri" pitchFamily="34" charset="0"/>
-                <a:ea typeface="Calibri" pitchFamily="34" charset="-122"/>
-                <a:cs typeface="Calibri" pitchFamily="34" charset="-120"/>
-              </a:rPr>
-              <a:t>Задача 1c. Скрины всех правильных ответов (learningapps.org)</a:t>
-            </a:r>
-            <a:endParaRPr lang="en-US" sz="1300" dirty="0"/>
-          </a:p>
-        </p:txBody>
-      </p:sp>
-      <p:sp>
-        <p:nvSpPr>
-          <p:cNvPr id="6" name="Shape 4"/>
-          <p:cNvSpPr/>
-          <p:nvPr/>
-        </p:nvSpPr>
-        <p:spPr>
-          <a:xfrm>
-            <a:off x="457200" y="1737360"/>
-            <a:ext cx="5486400" cy="4480560"/>
-          </a:xfrm>
-          <a:prstGeom prst="rect">
-            <a:avLst/>
-          </a:prstGeom>
-          <a:solidFill>
-            <a:srgbClr val="E8EAEE"/>
-          </a:solidFill>
-          <a:ln w="15875">
-            <a:solidFill>
-              <a:srgbClr val="AEB4C0"/>
-            </a:solidFill>
-            <a:prstDash val="dash"/>
-          </a:ln>
-        </p:spPr>
-      </p:sp>
-      <p:sp>
-        <p:nvSpPr>
-          <p:cNvPr id="7" name="Text 5"/>
-          <p:cNvSpPr/>
-          <p:nvPr/>
-        </p:nvSpPr>
-        <p:spPr>
-          <a:xfrm>
-            <a:off x="457200" y="1737360"/>
-            <a:ext cx="5486400" cy="4480560"/>
-          </a:xfrm>
-          <a:prstGeom prst="rect">
-            <a:avLst/>
-          </a:prstGeom>
-          <a:noFill/>
-          <a:ln/>
-        </p:spPr>
-        <p:txBody>
-          <a:bodyPr wrap="square" rtlCol="0" anchor="ctr"/>
-          <a:lstStyle/>
-          <a:p>
-            <a:pPr algn="ctr" indent="0" marL="0">
-              <a:buNone/>
-            </a:pPr>
-            <a:r>
-              <a:rPr lang="en-US" sz="1800" dirty="0">
-                <a:solidFill>
-                  <a:srgbClr val="000000"/>
-                </a:solidFill>
-                <a:latin typeface="Calibri" pitchFamily="34" charset="0"/>
-                <a:ea typeface="Calibri" pitchFamily="34" charset="-122"/>
-                <a:cs typeface="Calibri" pitchFamily="34" charset="-120"/>
-              </a:rPr>
-              <a:t>🖼  </a:t>
-            </a:r>
-            <a:pPr algn="ctr" indent="0" marL="0">
-              <a:buNone/>
-            </a:pPr>
-            <a:r>
-              <a:rPr lang="en-US" sz="1300" i="1" dirty="0">
-                <a:solidFill>
-                  <a:srgbClr val="6B7280"/>
-                </a:solidFill>
-                <a:latin typeface="Calibri" pitchFamily="34" charset="0"/>
-                <a:ea typeface="Calibri" pitchFamily="34" charset="-122"/>
-                <a:cs typeface="Calibri" pitchFamily="34" charset="-120"/>
-              </a:rPr>
-              <a:t>Скриншот ответов — часть 1</a:t>
-            </a:r>
-            <a:endParaRPr lang="en-US" sz="1800" dirty="0"/>
-          </a:p>
-        </p:txBody>
-      </p:sp>
-      <p:sp>
-        <p:nvSpPr>
-          <p:cNvPr id="8" name="Shape 6"/>
-          <p:cNvSpPr/>
-          <p:nvPr/>
-        </p:nvSpPr>
-        <p:spPr>
-          <a:xfrm>
-            <a:off x="6217920" y="1737360"/>
-            <a:ext cx="5486400" cy="4480560"/>
-          </a:xfrm>
-          <a:prstGeom prst="rect">
-            <a:avLst/>
-          </a:prstGeom>
-          <a:solidFill>
-            <a:srgbClr val="E8EAEE"/>
-          </a:solidFill>
-          <a:ln w="15875">
-            <a:solidFill>
-              <a:srgbClr val="AEB4C0"/>
-            </a:solidFill>
-            <a:prstDash val="dash"/>
-          </a:ln>
-        </p:spPr>
-      </p:sp>
-      <p:sp>
-        <p:nvSpPr>
-          <p:cNvPr id="9" name="Text 7"/>
-          <p:cNvSpPr/>
-          <p:nvPr/>
-        </p:nvSpPr>
-        <p:spPr>
-          <a:xfrm>
-            <a:off x="6217920" y="1737360"/>
-            <a:ext cx="5486400" cy="4480560"/>
-          </a:xfrm>
-          <a:prstGeom prst="rect">
-            <a:avLst/>
-          </a:prstGeom>
-          <a:noFill/>
-          <a:ln/>
-        </p:spPr>
-        <p:txBody>
-          <a:bodyPr wrap="square" rtlCol="0" anchor="ctr"/>
-          <a:lstStyle/>
-          <a:p>
-            <a:pPr algn="ctr" indent="0" marL="0">
-              <a:buNone/>
-            </a:pPr>
-            <a:r>
-              <a:rPr lang="en-US" sz="1800" dirty="0">
-                <a:solidFill>
-                  <a:srgbClr val="000000"/>
-                </a:solidFill>
-                <a:latin typeface="Calibri" pitchFamily="34" charset="0"/>
-                <a:ea typeface="Calibri" pitchFamily="34" charset="-122"/>
-                <a:cs typeface="Calibri" pitchFamily="34" charset="-120"/>
-              </a:rPr>
-              <a:t>🖼  </a:t>
-            </a:r>
-            <a:pPr algn="ctr" indent="0" marL="0">
-              <a:buNone/>
-            </a:pPr>
-            <a:r>
-              <a:rPr lang="en-US" sz="1300" i="1" dirty="0">
-                <a:solidFill>
-                  <a:srgbClr val="6B7280"/>
-                </a:solidFill>
-                <a:latin typeface="Calibri" pitchFamily="34" charset="0"/>
-                <a:ea typeface="Calibri" pitchFamily="34" charset="-122"/>
-                <a:cs typeface="Calibri" pitchFamily="34" charset="-120"/>
-              </a:rPr>
-              <a:t>Скриншот ответов — часть 2</a:t>
-            </a:r>
-            <a:endParaRPr lang="en-US" sz="1800" dirty="0"/>
-          </a:p>
-        </p:txBody>
-      </p:sp>
-      <p:sp>
-        <p:nvSpPr>
           <p:cNvPr id="10" name="Text 8"/>
           <p:cNvSpPr/>
           <p:nvPr/>
@@ -2982,7 +2540,7 @@
           <a:bodyPr wrap="square" rtlCol="0" anchor="ctr"/>
           <a:lstStyle/>
           <a:p>
-            <a:pPr indent="0" marL="0">
+            <a:pPr marL="0" indent="0">
               <a:buNone/>
             </a:pPr>
             <a:r>
@@ -3021,7 +2579,7 @@
           <a:bodyPr wrap="square" rtlCol="0" anchor="ctr"/>
           <a:lstStyle/>
           <a:p>
-            <a:pPr algn="r" indent="0" marL="0">
+            <a:pPr marL="0" indent="0" algn="r">
               <a:buNone/>
             </a:pPr>
             <a:r>
@@ -3039,6 +2597,186 @@
           </a:p>
         </p:txBody>
       </p:sp>
+      <p:pic>
+        <p:nvPicPr>
+          <p:cNvPr id="15" name="Рисунок 14" descr="Изображение выглядит как текст, снимок экрана, Цвет электрик, Красочность&#10;&#10;Контент, сгенерированный ИИ, может содержать ошибки.">
+            <a:extLst>
+              <a:ext uri="{FF2B5EF4-FFF2-40B4-BE49-F238E27FC236}">
+                <a16:creationId xmlns:a16="http://schemas.microsoft.com/office/drawing/2014/main" id="{4B466566-3F1D-E52A-30A0-DD43D18AB771}"/>
+              </a:ext>
+            </a:extLst>
+          </p:cNvPr>
+          <p:cNvPicPr>
+            <a:picLocks noChangeAspect="1"/>
+          </p:cNvPicPr>
+          <p:nvPr/>
+        </p:nvPicPr>
+        <p:blipFill>
+          <a:blip r:embed="rId3"/>
+          <a:stretch>
+            <a:fillRect/>
+          </a:stretch>
+        </p:blipFill>
+        <p:spPr>
+          <a:xfrm>
+            <a:off x="8261865" y="3993512"/>
+            <a:ext cx="3300994" cy="1642674"/>
+          </a:xfrm>
+          <a:prstGeom prst="rect">
+            <a:avLst/>
+          </a:prstGeom>
+        </p:spPr>
+      </p:pic>
+      <p:pic>
+        <p:nvPicPr>
+          <p:cNvPr id="17" name="Рисунок 16" descr="Изображение выглядит как текст, снимок экрана, Цвет электрик, Шрифт&#10;&#10;Контент, сгенерированный ИИ, может содержать ошибки.">
+            <a:extLst>
+              <a:ext uri="{FF2B5EF4-FFF2-40B4-BE49-F238E27FC236}">
+                <a16:creationId xmlns:a16="http://schemas.microsoft.com/office/drawing/2014/main" id="{6AE61972-52B9-1E47-4111-7633142F621F}"/>
+              </a:ext>
+            </a:extLst>
+          </p:cNvPr>
+          <p:cNvPicPr>
+            <a:picLocks noChangeAspect="1"/>
+          </p:cNvPicPr>
+          <p:nvPr/>
+        </p:nvPicPr>
+        <p:blipFill>
+          <a:blip r:embed="rId4"/>
+          <a:stretch>
+            <a:fillRect/>
+          </a:stretch>
+        </p:blipFill>
+        <p:spPr>
+          <a:xfrm>
+            <a:off x="4250788" y="3989338"/>
+            <a:ext cx="3638109" cy="1646848"/>
+          </a:xfrm>
+          <a:prstGeom prst="rect">
+            <a:avLst/>
+          </a:prstGeom>
+        </p:spPr>
+      </p:pic>
+      <p:pic>
+        <p:nvPicPr>
+          <p:cNvPr id="19" name="Рисунок 18" descr="Изображение выглядит как текст, снимок экрана, Цвет электрик, Шрифт&#10;&#10;Контент, сгенерированный ИИ, может содержать ошибки.">
+            <a:extLst>
+              <a:ext uri="{FF2B5EF4-FFF2-40B4-BE49-F238E27FC236}">
+                <a16:creationId xmlns:a16="http://schemas.microsoft.com/office/drawing/2014/main" id="{2C70B38A-EC5A-01FE-C58C-5A23763CFDDA}"/>
+              </a:ext>
+            </a:extLst>
+          </p:cNvPr>
+          <p:cNvPicPr>
+            <a:picLocks noChangeAspect="1"/>
+          </p:cNvPicPr>
+          <p:nvPr/>
+        </p:nvPicPr>
+        <p:blipFill>
+          <a:blip r:embed="rId5"/>
+          <a:stretch>
+            <a:fillRect/>
+          </a:stretch>
+        </p:blipFill>
+        <p:spPr>
+          <a:xfrm>
+            <a:off x="597877" y="3993512"/>
+            <a:ext cx="3209779" cy="1646848"/>
+          </a:xfrm>
+          <a:prstGeom prst="rect">
+            <a:avLst/>
+          </a:prstGeom>
+        </p:spPr>
+      </p:pic>
+      <p:pic>
+        <p:nvPicPr>
+          <p:cNvPr id="21" name="Рисунок 20" descr="Изображение выглядит как текст, снимок экрана, Цвет электрик, Красочность&#10;&#10;Контент, сгенерированный ИИ, может содержать ошибки.">
+            <a:extLst>
+              <a:ext uri="{FF2B5EF4-FFF2-40B4-BE49-F238E27FC236}">
+                <a16:creationId xmlns:a16="http://schemas.microsoft.com/office/drawing/2014/main" id="{09000FD7-84D0-7590-6B15-60FB774C7AC8}"/>
+              </a:ext>
+            </a:extLst>
+          </p:cNvPr>
+          <p:cNvPicPr>
+            <a:picLocks noChangeAspect="1"/>
+          </p:cNvPicPr>
+          <p:nvPr/>
+        </p:nvPicPr>
+        <p:blipFill>
+          <a:blip r:embed="rId6"/>
+          <a:stretch>
+            <a:fillRect/>
+          </a:stretch>
+        </p:blipFill>
+        <p:spPr>
+          <a:xfrm>
+            <a:off x="597877" y="1949160"/>
+            <a:ext cx="3652911" cy="1642674"/>
+          </a:xfrm>
+          <a:prstGeom prst="rect">
+            <a:avLst/>
+          </a:prstGeom>
+        </p:spPr>
+      </p:pic>
+      <p:pic>
+        <p:nvPicPr>
+          <p:cNvPr id="23" name="Рисунок 22" descr="Изображение выглядит как текст, снимок экрана, Цвет электрик, Шрифт&#10;&#10;Контент, сгенерированный ИИ, может содержать ошибки.">
+            <a:extLst>
+              <a:ext uri="{FF2B5EF4-FFF2-40B4-BE49-F238E27FC236}">
+                <a16:creationId xmlns:a16="http://schemas.microsoft.com/office/drawing/2014/main" id="{77654FD7-18F6-1356-E857-1FE941A28DB4}"/>
+              </a:ext>
+            </a:extLst>
+          </p:cNvPr>
+          <p:cNvPicPr>
+            <a:picLocks noChangeAspect="1"/>
+          </p:cNvPicPr>
+          <p:nvPr/>
+        </p:nvPicPr>
+        <p:blipFill>
+          <a:blip r:embed="rId7"/>
+          <a:stretch>
+            <a:fillRect/>
+          </a:stretch>
+        </p:blipFill>
+        <p:spPr>
+          <a:xfrm>
+            <a:off x="4622057" y="1949160"/>
+            <a:ext cx="3292505" cy="1642674"/>
+          </a:xfrm>
+          <a:prstGeom prst="rect">
+            <a:avLst/>
+          </a:prstGeom>
+        </p:spPr>
+      </p:pic>
+      <p:pic>
+        <p:nvPicPr>
+          <p:cNvPr id="25" name="Рисунок 24" descr="Изображение выглядит как текст, снимок экрана, Цвет электрик, Шрифт&#10;&#10;Контент, сгенерированный ИИ, может содержать ошибки.">
+            <a:extLst>
+              <a:ext uri="{FF2B5EF4-FFF2-40B4-BE49-F238E27FC236}">
+                <a16:creationId xmlns:a16="http://schemas.microsoft.com/office/drawing/2014/main" id="{61CACB8E-E4C2-3DB9-1814-61F8E611590D}"/>
+              </a:ext>
+            </a:extLst>
+          </p:cNvPr>
+          <p:cNvPicPr>
+            <a:picLocks noChangeAspect="1"/>
+          </p:cNvPicPr>
+          <p:nvPr/>
+        </p:nvPicPr>
+        <p:blipFill>
+          <a:blip r:embed="rId8"/>
+          <a:stretch>
+            <a:fillRect/>
+          </a:stretch>
+        </p:blipFill>
+        <p:spPr>
+          <a:xfrm>
+            <a:off x="8285831" y="1949160"/>
+            <a:ext cx="3277028" cy="1642674"/>
+          </a:xfrm>
+          <a:prstGeom prst="rect">
+            <a:avLst/>
+          </a:prstGeom>
+        </p:spPr>
+      </p:pic>
     </p:spTree>
   </p:cSld>
   <p:clrMapOvr>
@@ -3105,11 +2843,11 @@
           <a:bodyPr wrap="square" rtlCol="0" anchor="ctr"/>
           <a:lstStyle/>
           <a:p>
-            <a:pPr indent="0" marL="0">
+            <a:pPr marL="0" indent="0">
               <a:buNone/>
             </a:pPr>
             <a:r>
-              <a:rPr lang="en-US" sz="1100" b="1" spc="200" kern="0" dirty="0">
+              <a:rPr lang="en-US" sz="1100" b="1" kern="0" spc="200" dirty="0">
                 <a:solidFill>
                   <a:srgbClr val="C9A24B"/>
                 </a:solidFill>
@@ -3144,7 +2882,7 @@
           <a:bodyPr wrap="square" rtlCol="0" anchor="ctr"/>
           <a:lstStyle/>
           <a:p>
-            <a:pPr indent="0" marL="0">
+            <a:pPr marL="0" indent="0">
               <a:buNone/>
             </a:pPr>
             <a:r>
@@ -3164,123 +2902,6 @@
       </p:sp>
       <p:sp>
         <p:nvSpPr>
-          <p:cNvPr id="5" name="Text 3"/>
-          <p:cNvSpPr/>
-          <p:nvPr/>
-        </p:nvSpPr>
-        <p:spPr>
-          <a:xfrm>
-            <a:off x="457200" y="1280160"/>
-            <a:ext cx="11247120" cy="365760"/>
-          </a:xfrm>
-          <a:prstGeom prst="rect">
-            <a:avLst/>
-          </a:prstGeom>
-          <a:noFill/>
-          <a:ln/>
-        </p:spPr>
-        <p:txBody>
-          <a:bodyPr wrap="square" rtlCol="0" anchor="ctr"/>
-          <a:lstStyle/>
-          <a:p>
-            <a:pPr indent="0" marL="0">
-              <a:buNone/>
-            </a:pPr>
-            <a:r>
-              <a:rPr lang="en-US" sz="1300" i="1" dirty="0">
-                <a:solidFill>
-                  <a:srgbClr val="1B2A4A"/>
-                </a:solidFill>
-                <a:latin typeface="Calibri" pitchFamily="34" charset="0"/>
-                <a:ea typeface="Calibri" pitchFamily="34" charset="-122"/>
-                <a:cs typeface="Calibri" pitchFamily="34" charset="-120"/>
-              </a:rPr>
-              <a:t>Задача 1d. Результат выполнения задания на сопоставление (learningapps.org)</a:t>
-            </a:r>
-            <a:endParaRPr lang="en-US" sz="1300" dirty="0"/>
-          </a:p>
-        </p:txBody>
-      </p:sp>
-      <p:sp>
-        <p:nvSpPr>
-          <p:cNvPr id="6" name="Shape 4"/>
-          <p:cNvSpPr/>
-          <p:nvPr/>
-        </p:nvSpPr>
-        <p:spPr>
-          <a:xfrm>
-            <a:off x="457200" y="1737360"/>
-            <a:ext cx="11247120" cy="4480560"/>
-          </a:xfrm>
-          <a:prstGeom prst="rect">
-            <a:avLst/>
-          </a:prstGeom>
-          <a:solidFill>
-            <a:srgbClr val="E8EAEE"/>
-          </a:solidFill>
-          <a:ln w="15875">
-            <a:solidFill>
-              <a:srgbClr val="AEB4C0"/>
-            </a:solidFill>
-            <a:prstDash val="dash"/>
-          </a:ln>
-        </p:spPr>
-      </p:sp>
-      <p:sp>
-        <p:nvSpPr>
-          <p:cNvPr id="7" name="Text 5"/>
-          <p:cNvSpPr/>
-          <p:nvPr/>
-        </p:nvSpPr>
-        <p:spPr>
-          <a:xfrm>
-            <a:off x="457200" y="1737360"/>
-            <a:ext cx="11247120" cy="4480560"/>
-          </a:xfrm>
-          <a:prstGeom prst="rect">
-            <a:avLst/>
-          </a:prstGeom>
-          <a:noFill/>
-          <a:ln/>
-        </p:spPr>
-        <p:txBody>
-          <a:bodyPr wrap="square" rtlCol="0" anchor="ctr"/>
-          <a:lstStyle/>
-          <a:p>
-            <a:pPr algn="ctr" indent="0" marL="0">
-              <a:buNone/>
-            </a:pPr>
-            <a:r>
-              <a:rPr lang="en-US" sz="1800" dirty="0">
-                <a:solidFill>
-                  <a:srgbClr val="000000"/>
-                </a:solidFill>
-                <a:latin typeface="Calibri" pitchFamily="34" charset="0"/>
-                <a:ea typeface="Calibri" pitchFamily="34" charset="-122"/>
-                <a:cs typeface="Calibri" pitchFamily="34" charset="-120"/>
-              </a:rPr>
-              <a:t>🖼  </a:t>
-            </a:r>
-            <a:pPr algn="ctr" indent="0" marL="0">
-              <a:buNone/>
-            </a:pPr>
-            <a:r>
-              <a:rPr lang="en-US" sz="1300" i="1" dirty="0">
-                <a:solidFill>
-                  <a:srgbClr val="6B7280"/>
-                </a:solidFill>
-                <a:latin typeface="Calibri" pitchFamily="34" charset="0"/>
-                <a:ea typeface="Calibri" pitchFamily="34" charset="-122"/>
-                <a:cs typeface="Calibri" pitchFamily="34" charset="-120"/>
-              </a:rPr>
-              <a:t>Скриншот: правильно выполненное задание на соответствие терминов</a:t>
-            </a:r>
-            <a:endParaRPr lang="en-US" sz="1800" dirty="0"/>
-          </a:p>
-        </p:txBody>
-      </p:sp>
-      <p:sp>
-        <p:nvSpPr>
           <p:cNvPr id="8" name="Text 6"/>
           <p:cNvSpPr/>
           <p:nvPr/>
@@ -3300,7 +2921,7 @@
           <a:bodyPr wrap="square" rtlCol="0" anchor="ctr"/>
           <a:lstStyle/>
           <a:p>
-            <a:pPr indent="0" marL="0">
+            <a:pPr marL="0" indent="0">
               <a:buNone/>
             </a:pPr>
             <a:r>
@@ -3339,7 +2960,7 @@
           <a:bodyPr wrap="square" rtlCol="0" anchor="ctr"/>
           <a:lstStyle/>
           <a:p>
-            <a:pPr algn="r" indent="0" marL="0">
+            <a:pPr marL="0" indent="0" algn="r">
               <a:buNone/>
             </a:pPr>
             <a:r>
@@ -3357,6 +2978,36 @@
           </a:p>
         </p:txBody>
       </p:sp>
+      <p:pic>
+        <p:nvPicPr>
+          <p:cNvPr id="11" name="Рисунок 10">
+            <a:extLst>
+              <a:ext uri="{FF2B5EF4-FFF2-40B4-BE49-F238E27FC236}">
+                <a16:creationId xmlns:a16="http://schemas.microsoft.com/office/drawing/2014/main" id="{CFE3AC2C-8C14-617F-54DF-56FEA8D8AED8}"/>
+              </a:ext>
+            </a:extLst>
+          </p:cNvPr>
+          <p:cNvPicPr>
+            <a:picLocks noChangeAspect="1"/>
+          </p:cNvPicPr>
+          <p:nvPr/>
+        </p:nvPicPr>
+        <p:blipFill>
+          <a:blip r:embed="rId3"/>
+          <a:stretch>
+            <a:fillRect/>
+          </a:stretch>
+        </p:blipFill>
+        <p:spPr>
+          <a:xfrm>
+            <a:off x="1641231" y="1482433"/>
+            <a:ext cx="9036148" cy="4786335"/>
+          </a:xfrm>
+          <a:prstGeom prst="rect">
+            <a:avLst/>
+          </a:prstGeom>
+        </p:spPr>
+      </p:pic>
     </p:spTree>
   </p:cSld>
   <p:clrMapOvr>
@@ -3423,11 +3074,11 @@
           <a:bodyPr wrap="square" rtlCol="0" anchor="ctr"/>
           <a:lstStyle/>
           <a:p>
-            <a:pPr indent="0" marL="0">
+            <a:pPr marL="0" indent="0">
               <a:buNone/>
             </a:pPr>
             <a:r>
-              <a:rPr lang="en-US" sz="1100" b="1" spc="200" kern="0" dirty="0">
+              <a:rPr lang="en-US" sz="1100" b="1" kern="0" spc="200" dirty="0">
                 <a:solidFill>
                   <a:srgbClr val="C9A24B"/>
                 </a:solidFill>
@@ -3462,7 +3113,7 @@
           <a:bodyPr wrap="square" rtlCol="0" anchor="ctr"/>
           <a:lstStyle/>
           <a:p>
-            <a:pPr indent="0" marL="0">
+            <a:pPr marL="0" indent="0">
               <a:buNone/>
             </a:pPr>
             <a:r>
@@ -3480,702 +3131,6 @@
           </a:p>
         </p:txBody>
       </p:sp>
-      <p:graphicFrame>
-        <p:nvGraphicFramePr>
-          <p:cNvPr id="7" name="Table 0"/>
-          <p:cNvGraphicFramePr>
-            <a:graphicFrameLocks noGrp="1"/>
-          </p:cNvGraphicFramePr>
-          <p:nvPr>
-            <p:extLst>
-              <p:ext uri="{D42A27DB-BD31-4B8C-83A1-F6EECF244321}">
-                <p14:modId xmlns:p14="http://schemas.microsoft.com/office/powerpoint/2010/main" val="1579011935"/>
-              </p:ext>
-            </p:extLst>
-          </p:nvPr>
-        </p:nvGraphicFramePr>
-        <p:xfrm>
-          <a:off x="457200" y="1463040"/>
-          <a:ext cx="11247120" cy="4206240"/>
-        </p:xfrm>
-        <a:graphic>
-          <a:graphicData uri="http://schemas.openxmlformats.org/drawingml/2006/table">
-            <a:tbl>
-              <a:tblPr/>
-              <a:tblGrid>
-                <a:gridCol w="3657600"/>
-                <a:gridCol w="7589520"/>
-              </a:tblGrid>
-              <a:tr h="841248">
-                <a:tc>
-                  <a:txBody>
-                    <a:bodyPr/>
-                    <a:lstStyle/>
-                    <a:p>
-                      <a:pPr indent="0" marL="0">
-                        <a:buNone/>
-                      </a:pPr>
-                      <a:r>
-                        <a:rPr lang="en-US" sz="1400" b="1" dirty="0">
-                          <a:solidFill>
-                            <a:srgbClr val="FFFFFF"/>
-                          </a:solidFill>
-                          <a:latin typeface="Calibri" pitchFamily="34" charset="0"/>
-                          <a:ea typeface="Calibri" pitchFamily="34" charset="-122"/>
-                          <a:cs typeface="Calibri" pitchFamily="34" charset="-120"/>
-                        </a:rPr>
-                        <a:t>Термин</a:t>
-                      </a:r>
-                      <a:endParaRPr lang="en-US" sz="1400" dirty="0">
-                        <a:latin typeface="Calibri" charset="0"/>
-                        <a:ea typeface="Calibri" charset="0"/>
-                        <a:cs typeface="Calibri" charset="0"/>
-                      </a:endParaRPr>
-                    </a:p>
-                  </a:txBody>
-                  <a:tcPr marL="91440" marR="91440" marT="45720" marB="45720" anchor="ctr">
-                    <a:lnL w="9525" cap="flat" cmpd="sng" algn="ctr">
-                      <a:solidFill>
-                        <a:srgbClr val="AEB4C0"/>
-                      </a:solidFill>
-                      <a:prstDash val="solid"/>
-                      <a:round/>
-                      <a:headEnd type="none" w="med" len="med"/>
-                      <a:tailEnd type="none" w="med" len="med"/>
-                    </a:lnL>
-                    <a:lnR w="9525" cap="flat" cmpd="sng" algn="ctr">
-                      <a:solidFill>
-                        <a:srgbClr val="AEB4C0"/>
-                      </a:solidFill>
-                      <a:prstDash val="solid"/>
-                      <a:round/>
-                      <a:headEnd type="none" w="med" len="med"/>
-                      <a:tailEnd type="none" w="med" len="med"/>
-                    </a:lnR>
-                    <a:lnT w="9525" cap="flat" cmpd="sng" algn="ctr">
-                      <a:solidFill>
-                        <a:srgbClr val="AEB4C0"/>
-                      </a:solidFill>
-                      <a:prstDash val="solid"/>
-                      <a:round/>
-                      <a:headEnd type="none" w="med" len="med"/>
-                      <a:tailEnd type="none" w="med" len="med"/>
-                    </a:lnT>
-                    <a:lnB w="9525" cap="flat" cmpd="sng" algn="ctr">
-                      <a:solidFill>
-                        <a:srgbClr val="AEB4C0"/>
-                      </a:solidFill>
-                      <a:prstDash val="solid"/>
-                      <a:round/>
-                      <a:headEnd type="none" w="med" len="med"/>
-                      <a:tailEnd type="none" w="med" len="med"/>
-                    </a:lnB>
-                    <a:solidFill>
-                      <a:srgbClr val="1B2A4A"/>
-                    </a:solidFill>
-                  </a:tcPr>
-                </a:tc>
-                <a:tc>
-                  <a:txBody>
-                    <a:bodyPr/>
-                    <a:lstStyle/>
-                    <a:p>
-                      <a:pPr indent="0" marL="0">
-                        <a:buNone/>
-                      </a:pPr>
-                      <a:r>
-                        <a:rPr lang="en-US" sz="1400" b="1" dirty="0">
-                          <a:solidFill>
-                            <a:srgbClr val="FFFFFF"/>
-                          </a:solidFill>
-                          <a:latin typeface="Calibri" pitchFamily="34" charset="0"/>
-                          <a:ea typeface="Calibri" pitchFamily="34" charset="-122"/>
-                          <a:cs typeface="Calibri" pitchFamily="34" charset="-120"/>
-                        </a:rPr>
-                        <a:t>Определение</a:t>
-                      </a:r>
-                      <a:endParaRPr lang="en-US" sz="1400" dirty="0">
-                        <a:latin typeface="Calibri" charset="0"/>
-                        <a:ea typeface="Calibri" charset="0"/>
-                        <a:cs typeface="Calibri" charset="0"/>
-                      </a:endParaRPr>
-                    </a:p>
-                  </a:txBody>
-                  <a:tcPr marL="91440" marR="91440" marT="45720" marB="45720" anchor="ctr">
-                    <a:lnL w="9525" cap="flat" cmpd="sng" algn="ctr">
-                      <a:solidFill>
-                        <a:srgbClr val="AEB4C0"/>
-                      </a:solidFill>
-                      <a:prstDash val="solid"/>
-                      <a:round/>
-                      <a:headEnd type="none" w="med" len="med"/>
-                      <a:tailEnd type="none" w="med" len="med"/>
-                    </a:lnL>
-                    <a:lnR w="9525" cap="flat" cmpd="sng" algn="ctr">
-                      <a:solidFill>
-                        <a:srgbClr val="AEB4C0"/>
-                      </a:solidFill>
-                      <a:prstDash val="solid"/>
-                      <a:round/>
-                      <a:headEnd type="none" w="med" len="med"/>
-                      <a:tailEnd type="none" w="med" len="med"/>
-                    </a:lnR>
-                    <a:lnT w="9525" cap="flat" cmpd="sng" algn="ctr">
-                      <a:solidFill>
-                        <a:srgbClr val="AEB4C0"/>
-                      </a:solidFill>
-                      <a:prstDash val="solid"/>
-                      <a:round/>
-                      <a:headEnd type="none" w="med" len="med"/>
-                      <a:tailEnd type="none" w="med" len="med"/>
-                    </a:lnT>
-                    <a:lnB w="9525" cap="flat" cmpd="sng" algn="ctr">
-                      <a:solidFill>
-                        <a:srgbClr val="AEB4C0"/>
-                      </a:solidFill>
-                      <a:prstDash val="solid"/>
-                      <a:round/>
-                      <a:headEnd type="none" w="med" len="med"/>
-                      <a:tailEnd type="none" w="med" len="med"/>
-                    </a:lnB>
-                    <a:solidFill>
-                      <a:srgbClr val="1B2A4A"/>
-                    </a:solidFill>
-                  </a:tcPr>
-                </a:tc>
-              </a:tr>
-              <a:tr h="841248">
-                <a:tc>
-                  <a:txBody>
-                    <a:bodyPr/>
-                    <a:lstStyle/>
-                    <a:p>
-                      <a:pPr indent="0" marL="0">
-                        <a:buNone/>
-                      </a:pPr>
-                      <a:r>
-                        <a:rPr lang="en-US" sz="1400" dirty="0">
-                          <a:solidFill>
-                            <a:srgbClr val="000000"/>
-                          </a:solidFill>
-                          <a:latin typeface="Calibri" pitchFamily="34" charset="0"/>
-                          <a:ea typeface="Calibri" pitchFamily="34" charset="-122"/>
-                          <a:cs typeface="Calibri" pitchFamily="34" charset="-120"/>
-                        </a:rPr>
-                        <a:t>[Термин 1]</a:t>
-                      </a:r>
-                      <a:endParaRPr lang="en-US" sz="1400" dirty="0">
-                        <a:latin typeface="Calibri" charset="0"/>
-                        <a:ea typeface="Calibri" charset="0"/>
-                        <a:cs typeface="Calibri" charset="0"/>
-                      </a:endParaRPr>
-                    </a:p>
-                  </a:txBody>
-                  <a:tcPr marL="91440" marR="91440" marT="45720" marB="45720" anchor="ctr">
-                    <a:lnL w="9525" cap="flat" cmpd="sng" algn="ctr">
-                      <a:solidFill>
-                        <a:srgbClr val="AEB4C0"/>
-                      </a:solidFill>
-                      <a:prstDash val="solid"/>
-                      <a:round/>
-                      <a:headEnd type="none" w="med" len="med"/>
-                      <a:tailEnd type="none" w="med" len="med"/>
-                    </a:lnL>
-                    <a:lnR w="9525" cap="flat" cmpd="sng" algn="ctr">
-                      <a:solidFill>
-                        <a:srgbClr val="AEB4C0"/>
-                      </a:solidFill>
-                      <a:prstDash val="solid"/>
-                      <a:round/>
-                      <a:headEnd type="none" w="med" len="med"/>
-                      <a:tailEnd type="none" w="med" len="med"/>
-                    </a:lnR>
-                    <a:lnT w="9525" cap="flat" cmpd="sng" algn="ctr">
-                      <a:solidFill>
-                        <a:srgbClr val="AEB4C0"/>
-                      </a:solidFill>
-                      <a:prstDash val="solid"/>
-                      <a:round/>
-                      <a:headEnd type="none" w="med" len="med"/>
-                      <a:tailEnd type="none" w="med" len="med"/>
-                    </a:lnT>
-                    <a:lnB w="9525" cap="flat" cmpd="sng" algn="ctr">
-                      <a:solidFill>
-                        <a:srgbClr val="AEB4C0"/>
-                      </a:solidFill>
-                      <a:prstDash val="solid"/>
-                      <a:round/>
-                      <a:headEnd type="none" w="med" len="med"/>
-                      <a:tailEnd type="none" w="med" len="med"/>
-                    </a:lnB>
-                  </a:tcPr>
-                </a:tc>
-                <a:tc>
-                  <a:txBody>
-                    <a:bodyPr/>
-                    <a:lstStyle/>
-                    <a:p>
-                      <a:pPr indent="0" marL="0">
-                        <a:buNone/>
-                      </a:pPr>
-                      <a:r>
-                        <a:rPr lang="en-US" sz="1400" dirty="0">
-                          <a:solidFill>
-                            <a:srgbClr val="000000"/>
-                          </a:solidFill>
-                          <a:latin typeface="Calibri" pitchFamily="34" charset="0"/>
-                          <a:ea typeface="Calibri" pitchFamily="34" charset="-122"/>
-                          <a:cs typeface="Calibri" pitchFamily="34" charset="-120"/>
-                        </a:rPr>
-                        <a:t>[Определение]</a:t>
-                      </a:r>
-                      <a:endParaRPr lang="en-US" sz="1400" dirty="0">
-                        <a:latin typeface="Calibri" charset="0"/>
-                        <a:ea typeface="Calibri" charset="0"/>
-                        <a:cs typeface="Calibri" charset="0"/>
-                      </a:endParaRPr>
-                    </a:p>
-                  </a:txBody>
-                  <a:tcPr marL="91440" marR="91440" marT="45720" marB="45720" anchor="ctr">
-                    <a:lnL w="9525" cap="flat" cmpd="sng" algn="ctr">
-                      <a:solidFill>
-                        <a:srgbClr val="AEB4C0"/>
-                      </a:solidFill>
-                      <a:prstDash val="solid"/>
-                      <a:round/>
-                      <a:headEnd type="none" w="med" len="med"/>
-                      <a:tailEnd type="none" w="med" len="med"/>
-                    </a:lnL>
-                    <a:lnR w="9525" cap="flat" cmpd="sng" algn="ctr">
-                      <a:solidFill>
-                        <a:srgbClr val="AEB4C0"/>
-                      </a:solidFill>
-                      <a:prstDash val="solid"/>
-                      <a:round/>
-                      <a:headEnd type="none" w="med" len="med"/>
-                      <a:tailEnd type="none" w="med" len="med"/>
-                    </a:lnR>
-                    <a:lnT w="9525" cap="flat" cmpd="sng" algn="ctr">
-                      <a:solidFill>
-                        <a:srgbClr val="AEB4C0"/>
-                      </a:solidFill>
-                      <a:prstDash val="solid"/>
-                      <a:round/>
-                      <a:headEnd type="none" w="med" len="med"/>
-                      <a:tailEnd type="none" w="med" len="med"/>
-                    </a:lnT>
-                    <a:lnB w="9525" cap="flat" cmpd="sng" algn="ctr">
-                      <a:solidFill>
-                        <a:srgbClr val="AEB4C0"/>
-                      </a:solidFill>
-                      <a:prstDash val="solid"/>
-                      <a:round/>
-                      <a:headEnd type="none" w="med" len="med"/>
-                      <a:tailEnd type="none" w="med" len="med"/>
-                    </a:lnB>
-                  </a:tcPr>
-                </a:tc>
-              </a:tr>
-              <a:tr h="841248">
-                <a:tc>
-                  <a:txBody>
-                    <a:bodyPr/>
-                    <a:lstStyle/>
-                    <a:p>
-                      <a:pPr indent="0" marL="0">
-                        <a:buNone/>
-                      </a:pPr>
-                      <a:r>
-                        <a:rPr lang="en-US" sz="1400" dirty="0">
-                          <a:solidFill>
-                            <a:srgbClr val="000000"/>
-                          </a:solidFill>
-                          <a:latin typeface="Calibri" pitchFamily="34" charset="0"/>
-                          <a:ea typeface="Calibri" pitchFamily="34" charset="-122"/>
-                          <a:cs typeface="Calibri" pitchFamily="34" charset="-120"/>
-                        </a:rPr>
-                        <a:t>[Термин 2]</a:t>
-                      </a:r>
-                      <a:endParaRPr lang="en-US" sz="1400" dirty="0">
-                        <a:latin typeface="Calibri" charset="0"/>
-                        <a:ea typeface="Calibri" charset="0"/>
-                        <a:cs typeface="Calibri" charset="0"/>
-                      </a:endParaRPr>
-                    </a:p>
-                  </a:txBody>
-                  <a:tcPr marL="91440" marR="91440" marT="45720" marB="45720" anchor="ctr">
-                    <a:lnL w="9525" cap="flat" cmpd="sng" algn="ctr">
-                      <a:solidFill>
-                        <a:srgbClr val="AEB4C0"/>
-                      </a:solidFill>
-                      <a:prstDash val="solid"/>
-                      <a:round/>
-                      <a:headEnd type="none" w="med" len="med"/>
-                      <a:tailEnd type="none" w="med" len="med"/>
-                    </a:lnL>
-                    <a:lnR w="9525" cap="flat" cmpd="sng" algn="ctr">
-                      <a:solidFill>
-                        <a:srgbClr val="AEB4C0"/>
-                      </a:solidFill>
-                      <a:prstDash val="solid"/>
-                      <a:round/>
-                      <a:headEnd type="none" w="med" len="med"/>
-                      <a:tailEnd type="none" w="med" len="med"/>
-                    </a:lnR>
-                    <a:lnT w="9525" cap="flat" cmpd="sng" algn="ctr">
-                      <a:solidFill>
-                        <a:srgbClr val="AEB4C0"/>
-                      </a:solidFill>
-                      <a:prstDash val="solid"/>
-                      <a:round/>
-                      <a:headEnd type="none" w="med" len="med"/>
-                      <a:tailEnd type="none" w="med" len="med"/>
-                    </a:lnT>
-                    <a:lnB w="9525" cap="flat" cmpd="sng" algn="ctr">
-                      <a:solidFill>
-                        <a:srgbClr val="AEB4C0"/>
-                      </a:solidFill>
-                      <a:prstDash val="solid"/>
-                      <a:round/>
-                      <a:headEnd type="none" w="med" len="med"/>
-                      <a:tailEnd type="none" w="med" len="med"/>
-                    </a:lnB>
-                  </a:tcPr>
-                </a:tc>
-                <a:tc>
-                  <a:txBody>
-                    <a:bodyPr/>
-                    <a:lstStyle/>
-                    <a:p>
-                      <a:pPr indent="0" marL="0">
-                        <a:buNone/>
-                      </a:pPr>
-                      <a:r>
-                        <a:rPr lang="en-US" sz="1400" dirty="0">
-                          <a:solidFill>
-                            <a:srgbClr val="000000"/>
-                          </a:solidFill>
-                          <a:latin typeface="Calibri" pitchFamily="34" charset="0"/>
-                          <a:ea typeface="Calibri" pitchFamily="34" charset="-122"/>
-                          <a:cs typeface="Calibri" pitchFamily="34" charset="-120"/>
-                        </a:rPr>
-                        <a:t>[Определение]</a:t>
-                      </a:r>
-                      <a:endParaRPr lang="en-US" sz="1400" dirty="0">
-                        <a:latin typeface="Calibri" charset="0"/>
-                        <a:ea typeface="Calibri" charset="0"/>
-                        <a:cs typeface="Calibri" charset="0"/>
-                      </a:endParaRPr>
-                    </a:p>
-                  </a:txBody>
-                  <a:tcPr marL="91440" marR="91440" marT="45720" marB="45720" anchor="ctr">
-                    <a:lnL w="9525" cap="flat" cmpd="sng" algn="ctr">
-                      <a:solidFill>
-                        <a:srgbClr val="AEB4C0"/>
-                      </a:solidFill>
-                      <a:prstDash val="solid"/>
-                      <a:round/>
-                      <a:headEnd type="none" w="med" len="med"/>
-                      <a:tailEnd type="none" w="med" len="med"/>
-                    </a:lnL>
-                    <a:lnR w="9525" cap="flat" cmpd="sng" algn="ctr">
-                      <a:solidFill>
-                        <a:srgbClr val="AEB4C0"/>
-                      </a:solidFill>
-                      <a:prstDash val="solid"/>
-                      <a:round/>
-                      <a:headEnd type="none" w="med" len="med"/>
-                      <a:tailEnd type="none" w="med" len="med"/>
-                    </a:lnR>
-                    <a:lnT w="9525" cap="flat" cmpd="sng" algn="ctr">
-                      <a:solidFill>
-                        <a:srgbClr val="AEB4C0"/>
-                      </a:solidFill>
-                      <a:prstDash val="solid"/>
-                      <a:round/>
-                      <a:headEnd type="none" w="med" len="med"/>
-                      <a:tailEnd type="none" w="med" len="med"/>
-                    </a:lnT>
-                    <a:lnB w="9525" cap="flat" cmpd="sng" algn="ctr">
-                      <a:solidFill>
-                        <a:srgbClr val="AEB4C0"/>
-                      </a:solidFill>
-                      <a:prstDash val="solid"/>
-                      <a:round/>
-                      <a:headEnd type="none" w="med" len="med"/>
-                      <a:tailEnd type="none" w="med" len="med"/>
-                    </a:lnB>
-                  </a:tcPr>
-                </a:tc>
-              </a:tr>
-              <a:tr h="841248">
-                <a:tc>
-                  <a:txBody>
-                    <a:bodyPr/>
-                    <a:lstStyle/>
-                    <a:p>
-                      <a:pPr indent="0" marL="0">
-                        <a:buNone/>
-                      </a:pPr>
-                      <a:r>
-                        <a:rPr lang="en-US" sz="1400" dirty="0">
-                          <a:solidFill>
-                            <a:srgbClr val="000000"/>
-                          </a:solidFill>
-                          <a:latin typeface="Calibri" pitchFamily="34" charset="0"/>
-                          <a:ea typeface="Calibri" pitchFamily="34" charset="-122"/>
-                          <a:cs typeface="Calibri" pitchFamily="34" charset="-120"/>
-                        </a:rPr>
-                        <a:t>[Термин 3]</a:t>
-                      </a:r>
-                      <a:endParaRPr lang="en-US" sz="1400" dirty="0">
-                        <a:latin typeface="Calibri" charset="0"/>
-                        <a:ea typeface="Calibri" charset="0"/>
-                        <a:cs typeface="Calibri" charset="0"/>
-                      </a:endParaRPr>
-                    </a:p>
-                  </a:txBody>
-                  <a:tcPr marL="91440" marR="91440" marT="45720" marB="45720" anchor="ctr">
-                    <a:lnL w="9525" cap="flat" cmpd="sng" algn="ctr">
-                      <a:solidFill>
-                        <a:srgbClr val="AEB4C0"/>
-                      </a:solidFill>
-                      <a:prstDash val="solid"/>
-                      <a:round/>
-                      <a:headEnd type="none" w="med" len="med"/>
-                      <a:tailEnd type="none" w="med" len="med"/>
-                    </a:lnL>
-                    <a:lnR w="9525" cap="flat" cmpd="sng" algn="ctr">
-                      <a:solidFill>
-                        <a:srgbClr val="AEB4C0"/>
-                      </a:solidFill>
-                      <a:prstDash val="solid"/>
-                      <a:round/>
-                      <a:headEnd type="none" w="med" len="med"/>
-                      <a:tailEnd type="none" w="med" len="med"/>
-                    </a:lnR>
-                    <a:lnT w="9525" cap="flat" cmpd="sng" algn="ctr">
-                      <a:solidFill>
-                        <a:srgbClr val="AEB4C0"/>
-                      </a:solidFill>
-                      <a:prstDash val="solid"/>
-                      <a:round/>
-                      <a:headEnd type="none" w="med" len="med"/>
-                      <a:tailEnd type="none" w="med" len="med"/>
-                    </a:lnT>
-                    <a:lnB w="9525" cap="flat" cmpd="sng" algn="ctr">
-                      <a:solidFill>
-                        <a:srgbClr val="AEB4C0"/>
-                      </a:solidFill>
-                      <a:prstDash val="solid"/>
-                      <a:round/>
-                      <a:headEnd type="none" w="med" len="med"/>
-                      <a:tailEnd type="none" w="med" len="med"/>
-                    </a:lnB>
-                  </a:tcPr>
-                </a:tc>
-                <a:tc>
-                  <a:txBody>
-                    <a:bodyPr/>
-                    <a:lstStyle/>
-                    <a:p>
-                      <a:pPr indent="0" marL="0">
-                        <a:buNone/>
-                      </a:pPr>
-                      <a:r>
-                        <a:rPr lang="en-US" sz="1400" dirty="0">
-                          <a:solidFill>
-                            <a:srgbClr val="000000"/>
-                          </a:solidFill>
-                          <a:latin typeface="Calibri" pitchFamily="34" charset="0"/>
-                          <a:ea typeface="Calibri" pitchFamily="34" charset="-122"/>
-                          <a:cs typeface="Calibri" pitchFamily="34" charset="-120"/>
-                        </a:rPr>
-                        <a:t>[Определение]</a:t>
-                      </a:r>
-                      <a:endParaRPr lang="en-US" sz="1400" dirty="0">
-                        <a:latin typeface="Calibri" charset="0"/>
-                        <a:ea typeface="Calibri" charset="0"/>
-                        <a:cs typeface="Calibri" charset="0"/>
-                      </a:endParaRPr>
-                    </a:p>
-                  </a:txBody>
-                  <a:tcPr marL="91440" marR="91440" marT="45720" marB="45720" anchor="ctr">
-                    <a:lnL w="9525" cap="flat" cmpd="sng" algn="ctr">
-                      <a:solidFill>
-                        <a:srgbClr val="AEB4C0"/>
-                      </a:solidFill>
-                      <a:prstDash val="solid"/>
-                      <a:round/>
-                      <a:headEnd type="none" w="med" len="med"/>
-                      <a:tailEnd type="none" w="med" len="med"/>
-                    </a:lnL>
-                    <a:lnR w="9525" cap="flat" cmpd="sng" algn="ctr">
-                      <a:solidFill>
-                        <a:srgbClr val="AEB4C0"/>
-                      </a:solidFill>
-                      <a:prstDash val="solid"/>
-                      <a:round/>
-                      <a:headEnd type="none" w="med" len="med"/>
-                      <a:tailEnd type="none" w="med" len="med"/>
-                    </a:lnR>
-                    <a:lnT w="9525" cap="flat" cmpd="sng" algn="ctr">
-                      <a:solidFill>
-                        <a:srgbClr val="AEB4C0"/>
-                      </a:solidFill>
-                      <a:prstDash val="solid"/>
-                      <a:round/>
-                      <a:headEnd type="none" w="med" len="med"/>
-                      <a:tailEnd type="none" w="med" len="med"/>
-                    </a:lnT>
-                    <a:lnB w="9525" cap="flat" cmpd="sng" algn="ctr">
-                      <a:solidFill>
-                        <a:srgbClr val="AEB4C0"/>
-                      </a:solidFill>
-                      <a:prstDash val="solid"/>
-                      <a:round/>
-                      <a:headEnd type="none" w="med" len="med"/>
-                      <a:tailEnd type="none" w="med" len="med"/>
-                    </a:lnB>
-                  </a:tcPr>
-                </a:tc>
-              </a:tr>
-              <a:tr h="841248">
-                <a:tc>
-                  <a:txBody>
-                    <a:bodyPr/>
-                    <a:lstStyle/>
-                    <a:p>
-                      <a:pPr indent="0" marL="0">
-                        <a:buNone/>
-                      </a:pPr>
-                      <a:r>
-                        <a:rPr lang="en-US" sz="1400" dirty="0">
-                          <a:solidFill>
-                            <a:srgbClr val="000000"/>
-                          </a:solidFill>
-                          <a:latin typeface="Calibri" pitchFamily="34" charset="0"/>
-                          <a:ea typeface="Calibri" pitchFamily="34" charset="-122"/>
-                          <a:cs typeface="Calibri" pitchFamily="34" charset="-120"/>
-                        </a:rPr>
-                        <a:t>[Термин 4]</a:t>
-                      </a:r>
-                      <a:endParaRPr lang="en-US" sz="1400" dirty="0">
-                        <a:latin typeface="Calibri" charset="0"/>
-                        <a:ea typeface="Calibri" charset="0"/>
-                        <a:cs typeface="Calibri" charset="0"/>
-                      </a:endParaRPr>
-                    </a:p>
-                  </a:txBody>
-                  <a:tcPr marL="91440" marR="91440" marT="45720" marB="45720" anchor="ctr">
-                    <a:lnL w="9525" cap="flat" cmpd="sng" algn="ctr">
-                      <a:solidFill>
-                        <a:srgbClr val="AEB4C0"/>
-                      </a:solidFill>
-                      <a:prstDash val="solid"/>
-                      <a:round/>
-                      <a:headEnd type="none" w="med" len="med"/>
-                      <a:tailEnd type="none" w="med" len="med"/>
-                    </a:lnL>
-                    <a:lnR w="9525" cap="flat" cmpd="sng" algn="ctr">
-                      <a:solidFill>
-                        <a:srgbClr val="AEB4C0"/>
-                      </a:solidFill>
-                      <a:prstDash val="solid"/>
-                      <a:round/>
-                      <a:headEnd type="none" w="med" len="med"/>
-                      <a:tailEnd type="none" w="med" len="med"/>
-                    </a:lnR>
-                    <a:lnT w="9525" cap="flat" cmpd="sng" algn="ctr">
-                      <a:solidFill>
-                        <a:srgbClr val="AEB4C0"/>
-                      </a:solidFill>
-                      <a:prstDash val="solid"/>
-                      <a:round/>
-                      <a:headEnd type="none" w="med" len="med"/>
-                      <a:tailEnd type="none" w="med" len="med"/>
-                    </a:lnT>
-                    <a:lnB w="9525" cap="flat" cmpd="sng" algn="ctr">
-                      <a:solidFill>
-                        <a:srgbClr val="AEB4C0"/>
-                      </a:solidFill>
-                      <a:prstDash val="solid"/>
-                      <a:round/>
-                      <a:headEnd type="none" w="med" len="med"/>
-                      <a:tailEnd type="none" w="med" len="med"/>
-                    </a:lnB>
-                  </a:tcPr>
-                </a:tc>
-                <a:tc>
-                  <a:txBody>
-                    <a:bodyPr/>
-                    <a:lstStyle/>
-                    <a:p>
-                      <a:pPr indent="0" marL="0">
-                        <a:buNone/>
-                      </a:pPr>
-                      <a:r>
-                        <a:rPr lang="en-US" sz="1400" dirty="0">
-                          <a:solidFill>
-                            <a:srgbClr val="000000"/>
-                          </a:solidFill>
-                          <a:latin typeface="Calibri" pitchFamily="34" charset="0"/>
-                          <a:ea typeface="Calibri" pitchFamily="34" charset="-122"/>
-                          <a:cs typeface="Calibri" pitchFamily="34" charset="-120"/>
-                        </a:rPr>
-                        <a:t>[Определение]</a:t>
-                      </a:r>
-                      <a:endParaRPr lang="en-US" sz="1400" dirty="0">
-                        <a:latin typeface="Calibri" charset="0"/>
-                        <a:ea typeface="Calibri" charset="0"/>
-                        <a:cs typeface="Calibri" charset="0"/>
-                      </a:endParaRPr>
-                    </a:p>
-                  </a:txBody>
-                  <a:tcPr marL="91440" marR="91440" marT="45720" marB="45720" anchor="ctr">
-                    <a:lnL w="9525" cap="flat" cmpd="sng" algn="ctr">
-                      <a:solidFill>
-                        <a:srgbClr val="AEB4C0"/>
-                      </a:solidFill>
-                      <a:prstDash val="solid"/>
-                      <a:round/>
-                      <a:headEnd type="none" w="med" len="med"/>
-                      <a:tailEnd type="none" w="med" len="med"/>
-                    </a:lnL>
-                    <a:lnR w="9525" cap="flat" cmpd="sng" algn="ctr">
-                      <a:solidFill>
-                        <a:srgbClr val="AEB4C0"/>
-                      </a:solidFill>
-                      <a:prstDash val="solid"/>
-                      <a:round/>
-                      <a:headEnd type="none" w="med" len="med"/>
-                      <a:tailEnd type="none" w="med" len="med"/>
-                    </a:lnR>
-                    <a:lnT w="9525" cap="flat" cmpd="sng" algn="ctr">
-                      <a:solidFill>
-                        <a:srgbClr val="AEB4C0"/>
-                      </a:solidFill>
-                      <a:prstDash val="solid"/>
-                      <a:round/>
-                      <a:headEnd type="none" w="med" len="med"/>
-                      <a:tailEnd type="none" w="med" len="med"/>
-                    </a:lnT>
-                    <a:lnB w="9525" cap="flat" cmpd="sng" algn="ctr">
-                      <a:solidFill>
-                        <a:srgbClr val="AEB4C0"/>
-                      </a:solidFill>
-                      <a:prstDash val="solid"/>
-                      <a:round/>
-                      <a:headEnd type="none" w="med" len="med"/>
-                      <a:tailEnd type="none" w="med" len="med"/>
-                    </a:lnB>
-                  </a:tcPr>
-                </a:tc>
-              </a:tr>
-            </a:tbl>
-          </a:graphicData>
-        </a:graphic>
-      </p:graphicFrame>
       <p:sp>
         <p:nvSpPr>
           <p:cNvPr id="6" name="Text 3"/>
@@ -4197,7 +3152,7 @@
           <a:bodyPr wrap="square" rtlCol="0" anchor="ctr"/>
           <a:lstStyle/>
           <a:p>
-            <a:pPr indent="0" marL="0">
+            <a:pPr marL="0" indent="0">
               <a:buNone/>
             </a:pPr>
             <a:r>
@@ -4217,7 +3172,7 @@
       </p:sp>
       <p:sp>
         <p:nvSpPr>
-          <p:cNvPr id="7" name="Text 4"/>
+          <p:cNvPr id="5" name="Text 4"/>
           <p:cNvSpPr/>
           <p:nvPr/>
         </p:nvSpPr>
@@ -4236,7 +3191,7 @@
           <a:bodyPr wrap="square" rtlCol="0" anchor="ctr"/>
           <a:lstStyle/>
           <a:p>
-            <a:pPr algn="r" indent="0" marL="0">
+            <a:pPr marL="0" indent="0" algn="r">
               <a:buNone/>
             </a:pPr>
             <a:r>
@@ -4251,6 +3206,127 @@
               <a:t>6</a:t>
             </a:r>
             <a:endParaRPr lang="en-US" sz="900" dirty="0"/>
+          </a:p>
+        </p:txBody>
+      </p:sp>
+      <p:sp>
+        <p:nvSpPr>
+          <p:cNvPr id="8" name="TextBox 7">
+            <a:extLst>
+              <a:ext uri="{FF2B5EF4-FFF2-40B4-BE49-F238E27FC236}">
+                <a16:creationId xmlns:a16="http://schemas.microsoft.com/office/drawing/2014/main" id="{5F699FF6-F3E7-B603-4C5C-99161C2282E2}"/>
+              </a:ext>
+            </a:extLst>
+          </p:cNvPr>
+          <p:cNvSpPr txBox="1"/>
+          <p:nvPr/>
+        </p:nvSpPr>
+        <p:spPr>
+          <a:xfrm>
+            <a:off x="457199" y="1386605"/>
+            <a:ext cx="11167403" cy="3785652"/>
+          </a:xfrm>
+          <a:prstGeom prst="rect">
+            <a:avLst/>
+          </a:prstGeom>
+          <a:noFill/>
+        </p:spPr>
+        <p:txBody>
+          <a:bodyPr wrap="square" rtlCol="0">
+            <a:spAutoFit/>
+          </a:bodyPr>
+          <a:lstStyle/>
+          <a:p>
+            <a:pPr algn="just"/>
+            <a:r>
+              <a:rPr lang="ru-RU" sz="2000" dirty="0"/>
+              <a:t>• Тонкий клиент – режим работы 1С, при котором часть вычислений выполняется на сервере,</a:t>
+            </a:r>
+          </a:p>
+          <a:p>
+            <a:pPr algn="just"/>
+            <a:r>
+              <a:rPr lang="ru-RU" sz="2000" dirty="0"/>
+              <a:t>а интерфейс отображается на устройстве пользователя.</a:t>
+            </a:r>
+          </a:p>
+          <a:p>
+            <a:pPr algn="just"/>
+            <a:r>
+              <a:rPr lang="ru-RU" sz="2000" dirty="0"/>
+              <a:t>• Толстый клиент – режим, при котором значительная часть обработки данных происходит на</a:t>
+            </a:r>
+          </a:p>
+          <a:p>
+            <a:pPr algn="just"/>
+            <a:r>
+              <a:rPr lang="ru-RU" sz="2000" dirty="0"/>
+              <a:t>стороне клиента.</a:t>
+            </a:r>
+          </a:p>
+          <a:p>
+            <a:pPr algn="just"/>
+            <a:r>
+              <a:rPr lang="ru-RU" sz="2000" dirty="0"/>
+              <a:t>• Мобильное приложение 1С – доступ к данным через смартфоны и планшеты.</a:t>
+            </a:r>
+          </a:p>
+          <a:p>
+            <a:pPr algn="just"/>
+            <a:r>
+              <a:rPr lang="ru-RU" sz="2000" dirty="0"/>
+              <a:t>• Сервер приложений – компонент, обеспечивающий работу клиент-серверного варианта.</a:t>
+            </a:r>
+          </a:p>
+          <a:p>
+            <a:pPr algn="just"/>
+            <a:r>
+              <a:rPr lang="ru-RU" sz="2000" dirty="0"/>
+              <a:t>• Лицензия 1С – тип разрешения на использование ПО (файловая, клиент-серверная,</a:t>
+            </a:r>
+          </a:p>
+          <a:p>
+            <a:pPr algn="just"/>
+            <a:r>
+              <a:rPr lang="ru-RU" sz="2000" dirty="0"/>
+              <a:t>облачная).</a:t>
+            </a:r>
+          </a:p>
+          <a:p>
+            <a:pPr algn="just"/>
+            <a:r>
+              <a:rPr lang="ru-RU" sz="2000" dirty="0"/>
+              <a:t>• 1С:Линк – сервис для удалённой работы с 1С через веб-браузер.</a:t>
+            </a:r>
+          </a:p>
+          <a:p>
+            <a:pPr algn="just"/>
+            <a:r>
+              <a:rPr lang="ru-RU" sz="2000" dirty="0"/>
+              <a:t>• RDP-доступ – технология удалённого подключения к рабочему месту с 1С.</a:t>
+            </a:r>
+          </a:p>
+          <a:p>
+            <a:pPr algn="just"/>
+            <a:r>
+              <a:rPr lang="ru-RU" sz="2000" dirty="0"/>
+              <a:t>• База данных (СУБД) – система управления данными (</a:t>
+            </a:r>
+            <a:r>
+              <a:rPr lang="ru-RU" sz="2000" dirty="0" err="1"/>
+              <a:t>PostgreSQL</a:t>
+            </a:r>
+            <a:r>
+              <a:rPr lang="ru-RU" sz="2000" dirty="0"/>
+              <a:t>, MS SQL, файловая СУБД</a:t>
+            </a:r>
+          </a:p>
+          <a:p>
+            <a:pPr algn="just"/>
+            <a:r>
+              <a:rPr lang="ru-RU" sz="2000" dirty="0"/>
+              <a:t>1С).</a:t>
+            </a:r>
           </a:p>
         </p:txBody>
       </p:sp>
@@ -4320,11 +3396,11 @@
           <a:bodyPr wrap="square" rtlCol="0" anchor="ctr"/>
           <a:lstStyle/>
           <a:p>
-            <a:pPr indent="0" marL="0">
+            <a:pPr marL="0" indent="0">
               <a:buNone/>
             </a:pPr>
             <a:r>
-              <a:rPr lang="en-US" sz="1100" b="1" spc="200" kern="0" dirty="0">
+              <a:rPr lang="en-US" sz="1100" b="1" kern="0" spc="200" dirty="0">
                 <a:solidFill>
                   <a:srgbClr val="C9A24B"/>
                 </a:solidFill>
@@ -4359,7 +3435,7 @@
           <a:bodyPr wrap="square" rtlCol="0" anchor="ctr"/>
           <a:lstStyle/>
           <a:p>
-            <a:pPr indent="0" marL="0">
+            <a:pPr marL="0" indent="0">
               <a:buNone/>
             </a:pPr>
             <a:r>
@@ -4379,418 +3455,6 @@
       </p:sp>
       <p:sp>
         <p:nvSpPr>
-          <p:cNvPr id="5" name="Shape 3"/>
-          <p:cNvSpPr/>
-          <p:nvPr/>
-        </p:nvSpPr>
-        <p:spPr>
-          <a:xfrm>
-            <a:off x="457200" y="1417320"/>
-            <a:ext cx="11247120" cy="1051560"/>
-          </a:xfrm>
-          <a:prstGeom prst="rect">
-            <a:avLst/>
-          </a:prstGeom>
-          <a:solidFill>
-            <a:srgbClr val="F4F5F7"/>
-          </a:solidFill>
-          <a:ln w="9525">
-            <a:solidFill>
-              <a:srgbClr val="AEB4C0"/>
-            </a:solidFill>
-            <a:prstDash val="solid"/>
-          </a:ln>
-        </p:spPr>
-      </p:sp>
-      <p:sp>
-        <p:nvSpPr>
-          <p:cNvPr id="6" name="Text 4"/>
-          <p:cNvSpPr/>
-          <p:nvPr/>
-        </p:nvSpPr>
-        <p:spPr>
-          <a:xfrm>
-            <a:off x="731520" y="1490472"/>
-            <a:ext cx="4114800" cy="457200"/>
-          </a:xfrm>
-          <a:prstGeom prst="rect">
-            <a:avLst/>
-          </a:prstGeom>
-          <a:noFill/>
-          <a:ln/>
-        </p:spPr>
-        <p:txBody>
-          <a:bodyPr wrap="square" rtlCol="0" anchor="ctr"/>
-          <a:lstStyle/>
-          <a:p>
-            <a:pPr indent="0" marL="0">
-              <a:buNone/>
-            </a:pPr>
-            <a:r>
-              <a:rPr lang="en-US" sz="1500" b="1" dirty="0">
-                <a:solidFill>
-                  <a:srgbClr val="1B2A4A"/>
-                </a:solidFill>
-                <a:latin typeface="Calibri" pitchFamily="34" charset="0"/>
-                <a:ea typeface="Calibri" pitchFamily="34" charset="-122"/>
-                <a:cs typeface="Calibri" pitchFamily="34" charset="-120"/>
-              </a:rPr>
-              <a:t>Операционная система</a:t>
-            </a:r>
-            <a:endParaRPr lang="en-US" sz="1500" dirty="0"/>
-          </a:p>
-        </p:txBody>
-      </p:sp>
-      <p:sp>
-        <p:nvSpPr>
-          <p:cNvPr id="7" name="Text 5"/>
-          <p:cNvSpPr/>
-          <p:nvPr/>
-        </p:nvSpPr>
-        <p:spPr>
-          <a:xfrm>
-            <a:off x="731520" y="1920240"/>
-            <a:ext cx="10698480" cy="457200"/>
-          </a:xfrm>
-          <a:prstGeom prst="rect">
-            <a:avLst/>
-          </a:prstGeom>
-          <a:noFill/>
-          <a:ln/>
-        </p:spPr>
-        <p:txBody>
-          <a:bodyPr wrap="square" rtlCol="0" anchor="ctr"/>
-          <a:lstStyle/>
-          <a:p>
-            <a:pPr indent="0" marL="0">
-              <a:buNone/>
-            </a:pPr>
-            <a:r>
-              <a:rPr lang="en-US" sz="1300" dirty="0">
-                <a:solidFill>
-                  <a:srgbClr val="6B7280"/>
-                </a:solidFill>
-                <a:latin typeface="Calibri" pitchFamily="34" charset="0"/>
-                <a:ea typeface="Calibri" pitchFamily="34" charset="-122"/>
-                <a:cs typeface="Calibri" pitchFamily="34" charset="-120"/>
-              </a:rPr>
-              <a:t>Windows 8</a:t>
-            </a:r>
-            <a:endParaRPr lang="en-US" sz="1300" dirty="0"/>
-          </a:p>
-        </p:txBody>
-      </p:sp>
-      <p:sp>
-        <p:nvSpPr>
-          <p:cNvPr id="8" name="Shape 6"/>
-          <p:cNvSpPr/>
-          <p:nvPr/>
-        </p:nvSpPr>
-        <p:spPr>
-          <a:xfrm>
-            <a:off x="457200" y="2651760"/>
-            <a:ext cx="11247120" cy="1051560"/>
-          </a:xfrm>
-          <a:prstGeom prst="rect">
-            <a:avLst/>
-          </a:prstGeom>
-          <a:solidFill>
-            <a:srgbClr val="F4F5F7"/>
-          </a:solidFill>
-          <a:ln w="9525">
-            <a:solidFill>
-              <a:srgbClr val="AEB4C0"/>
-            </a:solidFill>
-            <a:prstDash val="solid"/>
-          </a:ln>
-        </p:spPr>
-      </p:sp>
-      <p:sp>
-        <p:nvSpPr>
-          <p:cNvPr id="9" name="Text 7"/>
-          <p:cNvSpPr/>
-          <p:nvPr/>
-        </p:nvSpPr>
-        <p:spPr>
-          <a:xfrm>
-            <a:off x="731520" y="2724912"/>
-            <a:ext cx="4114800" cy="457200"/>
-          </a:xfrm>
-          <a:prstGeom prst="rect">
-            <a:avLst/>
-          </a:prstGeom>
-          <a:noFill/>
-          <a:ln/>
-        </p:spPr>
-        <p:txBody>
-          <a:bodyPr wrap="square" rtlCol="0" anchor="ctr"/>
-          <a:lstStyle/>
-          <a:p>
-            <a:pPr indent="0" marL="0">
-              <a:buNone/>
-            </a:pPr>
-            <a:r>
-              <a:rPr lang="en-US" sz="1500" b="1" dirty="0">
-                <a:solidFill>
-                  <a:srgbClr val="1B2A4A"/>
-                </a:solidFill>
-                <a:latin typeface="Calibri" pitchFamily="34" charset="0"/>
-                <a:ea typeface="Calibri" pitchFamily="34" charset="-122"/>
-                <a:cs typeface="Calibri" pitchFamily="34" charset="-120"/>
-              </a:rPr>
-              <a:t>Офисные пакеты</a:t>
-            </a:r>
-            <a:endParaRPr lang="en-US" sz="1500" dirty="0"/>
-          </a:p>
-        </p:txBody>
-      </p:sp>
-      <p:sp>
-        <p:nvSpPr>
-          <p:cNvPr id="10" name="Text 8"/>
-          <p:cNvSpPr/>
-          <p:nvPr/>
-        </p:nvSpPr>
-        <p:spPr>
-          <a:xfrm>
-            <a:off x="731520" y="3154680"/>
-            <a:ext cx="10698480" cy="457200"/>
-          </a:xfrm>
-          <a:prstGeom prst="rect">
-            <a:avLst/>
-          </a:prstGeom>
-          <a:noFill/>
-          <a:ln/>
-        </p:spPr>
-        <p:txBody>
-          <a:bodyPr wrap="square" rtlCol="0" anchor="ctr"/>
-          <a:lstStyle/>
-          <a:p>
-            <a:pPr indent="0" marL="0">
-              <a:buNone/>
-            </a:pPr>
-            <a:r>
-              <a:rPr lang="en-US" sz="1300" dirty="0">
-                <a:solidFill>
-                  <a:srgbClr val="6B7280"/>
-                </a:solidFill>
-                <a:latin typeface="Calibri" pitchFamily="34" charset="0"/>
-                <a:ea typeface="Calibri" pitchFamily="34" charset="-122"/>
-                <a:cs typeface="Calibri" pitchFamily="34" charset="-120"/>
-              </a:rPr>
-              <a:t>Microsoft Office, LibreOffice</a:t>
-            </a:r>
-            <a:endParaRPr lang="en-US" sz="1300" dirty="0"/>
-          </a:p>
-        </p:txBody>
-      </p:sp>
-      <p:sp>
-        <p:nvSpPr>
-          <p:cNvPr id="11" name="Shape 9"/>
-          <p:cNvSpPr/>
-          <p:nvPr/>
-        </p:nvSpPr>
-        <p:spPr>
-          <a:xfrm>
-            <a:off x="457200" y="3886200"/>
-            <a:ext cx="11247120" cy="1051560"/>
-          </a:xfrm>
-          <a:prstGeom prst="rect">
-            <a:avLst/>
-          </a:prstGeom>
-          <a:solidFill>
-            <a:srgbClr val="F4F5F7"/>
-          </a:solidFill>
-          <a:ln w="9525">
-            <a:solidFill>
-              <a:srgbClr val="AEB4C0"/>
-            </a:solidFill>
-            <a:prstDash val="solid"/>
-          </a:ln>
-        </p:spPr>
-      </p:sp>
-      <p:sp>
-        <p:nvSpPr>
-          <p:cNvPr id="12" name="Text 10"/>
-          <p:cNvSpPr/>
-          <p:nvPr/>
-        </p:nvSpPr>
-        <p:spPr>
-          <a:xfrm>
-            <a:off x="731520" y="3959352"/>
-            <a:ext cx="4114800" cy="457200"/>
-          </a:xfrm>
-          <a:prstGeom prst="rect">
-            <a:avLst/>
-          </a:prstGeom>
-          <a:noFill/>
-          <a:ln/>
-        </p:spPr>
-        <p:txBody>
-          <a:bodyPr wrap="square" rtlCol="0" anchor="ctr"/>
-          <a:lstStyle/>
-          <a:p>
-            <a:pPr indent="0" marL="0">
-              <a:buNone/>
-            </a:pPr>
-            <a:r>
-              <a:rPr lang="en-US" sz="1500" b="1" dirty="0">
-                <a:solidFill>
-                  <a:srgbClr val="1B2A4A"/>
-                </a:solidFill>
-                <a:latin typeface="Calibri" pitchFamily="34" charset="0"/>
-                <a:ea typeface="Calibri" pitchFamily="34" charset="-122"/>
-                <a:cs typeface="Calibri" pitchFamily="34" charset="-120"/>
-              </a:rPr>
-              <a:t>Браузеры</a:t>
-            </a:r>
-            <a:endParaRPr lang="en-US" sz="1500" dirty="0"/>
-          </a:p>
-        </p:txBody>
-      </p:sp>
-      <p:sp>
-        <p:nvSpPr>
-          <p:cNvPr id="13" name="Text 11"/>
-          <p:cNvSpPr/>
-          <p:nvPr/>
-        </p:nvSpPr>
-        <p:spPr>
-          <a:xfrm>
-            <a:off x="731520" y="4389120"/>
-            <a:ext cx="10698480" cy="457200"/>
-          </a:xfrm>
-          <a:prstGeom prst="rect">
-            <a:avLst/>
-          </a:prstGeom>
-          <a:noFill/>
-          <a:ln/>
-        </p:spPr>
-        <p:txBody>
-          <a:bodyPr wrap="square" rtlCol="0" anchor="ctr"/>
-          <a:lstStyle/>
-          <a:p>
-            <a:pPr indent="0" marL="0">
-              <a:buNone/>
-            </a:pPr>
-            <a:r>
-              <a:rPr lang="en-US" sz="1300" dirty="0">
-                <a:solidFill>
-                  <a:srgbClr val="6B7280"/>
-                </a:solidFill>
-                <a:latin typeface="Calibri" pitchFamily="34" charset="0"/>
-                <a:ea typeface="Calibri" pitchFamily="34" charset="-122"/>
-                <a:cs typeface="Calibri" pitchFamily="34" charset="-120"/>
-              </a:rPr>
-              <a:t>Opera, Google Chrome, Internet Explorer</a:t>
-            </a:r>
-            <a:endParaRPr lang="en-US" sz="1300" dirty="0"/>
-          </a:p>
-        </p:txBody>
-      </p:sp>
-      <p:sp>
-        <p:nvSpPr>
-          <p:cNvPr id="14" name="Shape 12"/>
-          <p:cNvSpPr/>
-          <p:nvPr/>
-        </p:nvSpPr>
-        <p:spPr>
-          <a:xfrm>
-            <a:off x="457200" y="5120640"/>
-            <a:ext cx="11247120" cy="1051560"/>
-          </a:xfrm>
-          <a:prstGeom prst="rect">
-            <a:avLst/>
-          </a:prstGeom>
-          <a:solidFill>
-            <a:srgbClr val="F4F5F7"/>
-          </a:solidFill>
-          <a:ln w="9525">
-            <a:solidFill>
-              <a:srgbClr val="AEB4C0"/>
-            </a:solidFill>
-            <a:prstDash val="solid"/>
-          </a:ln>
-        </p:spPr>
-      </p:sp>
-      <p:sp>
-        <p:nvSpPr>
-          <p:cNvPr id="15" name="Text 13"/>
-          <p:cNvSpPr/>
-          <p:nvPr/>
-        </p:nvSpPr>
-        <p:spPr>
-          <a:xfrm>
-            <a:off x="731520" y="5193792"/>
-            <a:ext cx="4114800" cy="457200"/>
-          </a:xfrm>
-          <a:prstGeom prst="rect">
-            <a:avLst/>
-          </a:prstGeom>
-          <a:noFill/>
-          <a:ln/>
-        </p:spPr>
-        <p:txBody>
-          <a:bodyPr wrap="square" rtlCol="0" anchor="ctr"/>
-          <a:lstStyle/>
-          <a:p>
-            <a:pPr indent="0" marL="0">
-              <a:buNone/>
-            </a:pPr>
-            <a:r>
-              <a:rPr lang="en-US" sz="1500" b="1" dirty="0">
-                <a:solidFill>
-                  <a:srgbClr val="1B2A4A"/>
-                </a:solidFill>
-                <a:latin typeface="Calibri" pitchFamily="34" charset="0"/>
-                <a:ea typeface="Calibri" pitchFamily="34" charset="-122"/>
-                <a:cs typeface="Calibri" pitchFamily="34" charset="-120"/>
-              </a:rPr>
-              <a:t>Веб-платформа</a:t>
-            </a:r>
-            <a:endParaRPr lang="en-US" sz="1500" dirty="0"/>
-          </a:p>
-        </p:txBody>
-      </p:sp>
-      <p:sp>
-        <p:nvSpPr>
-          <p:cNvPr id="16" name="Text 14"/>
-          <p:cNvSpPr/>
-          <p:nvPr/>
-        </p:nvSpPr>
-        <p:spPr>
-          <a:xfrm>
-            <a:off x="731520" y="5623560"/>
-            <a:ext cx="10698480" cy="457200"/>
-          </a:xfrm>
-          <a:prstGeom prst="rect">
-            <a:avLst/>
-          </a:prstGeom>
-          <a:noFill/>
-          <a:ln/>
-        </p:spPr>
-        <p:txBody>
-          <a:bodyPr wrap="square" rtlCol="0" anchor="ctr"/>
-          <a:lstStyle/>
-          <a:p>
-            <a:pPr indent="0" marL="0">
-              <a:buNone/>
-            </a:pPr>
-            <a:r>
-              <a:rPr lang="en-US" sz="1300" dirty="0">
-                <a:solidFill>
-                  <a:srgbClr val="6B7280"/>
-                </a:solidFill>
-                <a:latin typeface="Calibri" pitchFamily="34" charset="0"/>
-                <a:ea typeface="Calibri" pitchFamily="34" charset="-122"/>
-                <a:cs typeface="Calibri" pitchFamily="34" charset="-120"/>
-              </a:rPr>
-              <a:t>1С:Битрикс</a:t>
-            </a:r>
-            <a:endParaRPr lang="en-US" sz="1300" dirty="0"/>
-          </a:p>
-        </p:txBody>
-      </p:sp>
-      <p:sp>
-        <p:nvSpPr>
           <p:cNvPr id="17" name="Text 15"/>
           <p:cNvSpPr/>
           <p:nvPr/>
@@ -4810,7 +3474,7 @@
           <a:bodyPr wrap="square" rtlCol="0" anchor="ctr"/>
           <a:lstStyle/>
           <a:p>
-            <a:pPr indent="0" marL="0">
+            <a:pPr marL="0" indent="0">
               <a:buNone/>
             </a:pPr>
             <a:r>
@@ -4849,7 +3513,7 @@
           <a:bodyPr wrap="square" rtlCol="0" anchor="ctr"/>
           <a:lstStyle/>
           <a:p>
-            <a:pPr algn="r" indent="0" marL="0">
+            <a:pPr marL="0" indent="0" algn="r">
               <a:buNone/>
             </a:pPr>
             <a:r>
@@ -4864,6 +3528,92 @@
               <a:t>7</a:t>
             </a:r>
             <a:endParaRPr lang="en-US" sz="900" dirty="0"/>
+          </a:p>
+        </p:txBody>
+      </p:sp>
+      <p:sp>
+        <p:nvSpPr>
+          <p:cNvPr id="19" name="TextBox 18">
+            <a:extLst>
+              <a:ext uri="{FF2B5EF4-FFF2-40B4-BE49-F238E27FC236}">
+                <a16:creationId xmlns:a16="http://schemas.microsoft.com/office/drawing/2014/main" id="{5F0626E1-1BA9-C698-84C4-E03936C17D22}"/>
+              </a:ext>
+            </a:extLst>
+          </p:cNvPr>
+          <p:cNvSpPr txBox="1"/>
+          <p:nvPr/>
+        </p:nvSpPr>
+        <p:spPr>
+          <a:xfrm>
+            <a:off x="457200" y="1524000"/>
+            <a:ext cx="5828968" cy="1323439"/>
+          </a:xfrm>
+          <a:prstGeom prst="rect">
+            <a:avLst/>
+          </a:prstGeom>
+          <a:noFill/>
+        </p:spPr>
+        <p:txBody>
+          <a:bodyPr wrap="none" rtlCol="0">
+            <a:spAutoFit/>
+          </a:bodyPr>
+          <a:lstStyle/>
+          <a:p>
+            <a:pPr algn="just"/>
+            <a:r>
+              <a:rPr lang="ru-RU" sz="2000" dirty="0"/>
+              <a:t>• Платформа: 1</a:t>
+            </a:r>
+            <a:r>
+              <a:rPr lang="en-US" sz="2000" dirty="0"/>
+              <a:t>C:</a:t>
+            </a:r>
+            <a:r>
+              <a:rPr lang="ru-RU" sz="2000" dirty="0" err="1"/>
+              <a:t>Битрикс</a:t>
+            </a:r>
+            <a:endParaRPr lang="ru-RU" sz="2000" dirty="0"/>
+          </a:p>
+          <a:p>
+            <a:pPr algn="just"/>
+            <a:r>
+              <a:rPr lang="ru-RU" sz="2000" dirty="0"/>
+              <a:t>• Браузеры: </a:t>
+            </a:r>
+            <a:r>
+              <a:rPr lang="en-US" sz="2000" dirty="0"/>
+              <a:t>Google Chrome, Opera, Internet Explorer</a:t>
+            </a:r>
+          </a:p>
+          <a:p>
+            <a:pPr algn="just"/>
+            <a:r>
+              <a:rPr lang="en-US" sz="2000" dirty="0"/>
+              <a:t>• </a:t>
+            </a:r>
+            <a:r>
+              <a:rPr lang="ru-RU" sz="2000" dirty="0"/>
+              <a:t>Офисные пакеты: </a:t>
+            </a:r>
+            <a:r>
+              <a:rPr lang="en-US" sz="2000" dirty="0"/>
+              <a:t>Microsoft Office, Libre Office</a:t>
+            </a:r>
+          </a:p>
+          <a:p>
+            <a:pPr algn="just"/>
+            <a:r>
+              <a:rPr lang="en-US" sz="2000" dirty="0"/>
+              <a:t>• </a:t>
+            </a:r>
+            <a:r>
+              <a:rPr lang="ru-RU" sz="2000" dirty="0"/>
+              <a:t>Операционная система: </a:t>
+            </a:r>
+            <a:r>
+              <a:rPr lang="en-US" sz="2000" dirty="0"/>
+              <a:t>Windows 8</a:t>
+            </a:r>
           </a:p>
         </p:txBody>
       </p:sp>
@@ -4933,11 +3683,11 @@
           <a:bodyPr wrap="square" rtlCol="0" anchor="ctr"/>
           <a:lstStyle/>
           <a:p>
-            <a:pPr indent="0" marL="0">
+            <a:pPr marL="0" indent="0">
               <a:buNone/>
             </a:pPr>
             <a:r>
-              <a:rPr lang="en-US" sz="1100" b="1" spc="200" kern="0" dirty="0">
+              <a:rPr lang="en-US" sz="1100" b="1" kern="0" spc="200" dirty="0">
                 <a:solidFill>
                   <a:srgbClr val="C9A24B"/>
                 </a:solidFill>
@@ -4972,7 +3722,7 @@
           <a:bodyPr wrap="square" rtlCol="0" anchor="ctr"/>
           <a:lstStyle/>
           <a:p>
-            <a:pPr indent="0" marL="0">
+            <a:pPr marL="0" indent="0">
               <a:buNone/>
             </a:pPr>
             <a:r>
@@ -4992,123 +3742,6 @@
       </p:sp>
       <p:sp>
         <p:nvSpPr>
-          <p:cNvPr id="5" name="Text 3"/>
-          <p:cNvSpPr/>
-          <p:nvPr/>
-        </p:nvSpPr>
-        <p:spPr>
-          <a:xfrm>
-            <a:off x="457200" y="1280160"/>
-            <a:ext cx="11247120" cy="365760"/>
-          </a:xfrm>
-          <a:prstGeom prst="rect">
-            <a:avLst/>
-          </a:prstGeom>
-          <a:noFill/>
-          <a:ln/>
-        </p:spPr>
-        <p:txBody>
-          <a:bodyPr wrap="square" rtlCol="0" anchor="ctr"/>
-          <a:lstStyle/>
-          <a:p>
-            <a:pPr indent="0" marL="0">
-              <a:buNone/>
-            </a:pPr>
-            <a:r>
-              <a:rPr lang="en-US" sz="1300" i="1" dirty="0">
-                <a:solidFill>
-                  <a:srgbClr val="1B2A4A"/>
-                </a:solidFill>
-                <a:latin typeface="Calibri" pitchFamily="34" charset="0"/>
-                <a:ea typeface="Calibri" pitchFamily="34" charset="-122"/>
-                <a:cs typeface="Calibri" pitchFamily="34" charset="-120"/>
-              </a:rPr>
-              <a:t>Задача 1e. Список конфигураций (learningapps.org, учтите бегунок по количеству)</a:t>
-            </a:r>
-            <a:endParaRPr lang="en-US" sz="1300" dirty="0"/>
-          </a:p>
-        </p:txBody>
-      </p:sp>
-      <p:sp>
-        <p:nvSpPr>
-          <p:cNvPr id="6" name="Shape 4"/>
-          <p:cNvSpPr/>
-          <p:nvPr/>
-        </p:nvSpPr>
-        <p:spPr>
-          <a:xfrm>
-            <a:off x="457200" y="1737360"/>
-            <a:ext cx="11247120" cy="2743200"/>
-          </a:xfrm>
-          <a:prstGeom prst="rect">
-            <a:avLst/>
-          </a:prstGeom>
-          <a:solidFill>
-            <a:srgbClr val="E8EAEE"/>
-          </a:solidFill>
-          <a:ln w="15875">
-            <a:solidFill>
-              <a:srgbClr val="AEB4C0"/>
-            </a:solidFill>
-            <a:prstDash val="dash"/>
-          </a:ln>
-        </p:spPr>
-      </p:sp>
-      <p:sp>
-        <p:nvSpPr>
-          <p:cNvPr id="7" name="Text 5"/>
-          <p:cNvSpPr/>
-          <p:nvPr/>
-        </p:nvSpPr>
-        <p:spPr>
-          <a:xfrm>
-            <a:off x="457200" y="1737360"/>
-            <a:ext cx="11247120" cy="2743200"/>
-          </a:xfrm>
-          <a:prstGeom prst="rect">
-            <a:avLst/>
-          </a:prstGeom>
-          <a:noFill/>
-          <a:ln/>
-        </p:spPr>
-        <p:txBody>
-          <a:bodyPr wrap="square" rtlCol="0" anchor="ctr"/>
-          <a:lstStyle/>
-          <a:p>
-            <a:pPr algn="ctr" indent="0" marL="0">
-              <a:buNone/>
-            </a:pPr>
-            <a:r>
-              <a:rPr lang="en-US" sz="1800" dirty="0">
-                <a:solidFill>
-                  <a:srgbClr val="000000"/>
-                </a:solidFill>
-                <a:latin typeface="Calibri" pitchFamily="34" charset="0"/>
-                <a:ea typeface="Calibri" pitchFamily="34" charset="-122"/>
-                <a:cs typeface="Calibri" pitchFamily="34" charset="-120"/>
-              </a:rPr>
-              <a:t>🖼  </a:t>
-            </a:r>
-            <a:pPr algn="ctr" indent="0" marL="0">
-              <a:buNone/>
-            </a:pPr>
-            <a:r>
-              <a:rPr lang="en-US" sz="1300" i="1" dirty="0">
-                <a:solidFill>
-                  <a:srgbClr val="6B7280"/>
-                </a:solidFill>
-                <a:latin typeface="Calibri" pitchFamily="34" charset="0"/>
-                <a:ea typeface="Calibri" pitchFamily="34" charset="-122"/>
-                <a:cs typeface="Calibri" pitchFamily="34" charset="-120"/>
-              </a:rPr>
-              <a:t>Скриншот: список конфигураций 1С</a:t>
-            </a:r>
-            <a:endParaRPr lang="en-US" sz="1800" dirty="0"/>
-          </a:p>
-        </p:txBody>
-      </p:sp>
-      <p:sp>
-        <p:nvSpPr>
           <p:cNvPr id="8" name="Text 6"/>
           <p:cNvSpPr/>
           <p:nvPr/>
@@ -5128,7 +3761,7 @@
           <a:bodyPr wrap="square" rtlCol="0" anchor="ctr"/>
           <a:lstStyle/>
           <a:p>
-            <a:pPr indent="0" marL="0">
+            <a:pPr marL="0" indent="0">
               <a:buNone/>
             </a:pPr>
             <a:r>
@@ -5167,7 +3800,7 @@
           <a:bodyPr wrap="square" rtlCol="0" anchor="ctr"/>
           <a:lstStyle/>
           <a:p>
-            <a:pPr algn="r" indent="0" marL="0">
+            <a:pPr marL="0" indent="0" algn="r">
               <a:buNone/>
             </a:pPr>
             <a:r>
@@ -5185,6 +3818,36 @@
           </a:p>
         </p:txBody>
       </p:sp>
+      <p:pic>
+        <p:nvPicPr>
+          <p:cNvPr id="11" name="Рисунок 10">
+            <a:extLst>
+              <a:ext uri="{FF2B5EF4-FFF2-40B4-BE49-F238E27FC236}">
+                <a16:creationId xmlns:a16="http://schemas.microsoft.com/office/drawing/2014/main" id="{D0332EE8-BF9A-D62B-E767-407422E4EB06}"/>
+              </a:ext>
+            </a:extLst>
+          </p:cNvPr>
+          <p:cNvPicPr>
+            <a:picLocks noChangeAspect="1"/>
+          </p:cNvPicPr>
+          <p:nvPr/>
+        </p:nvPicPr>
+        <p:blipFill>
+          <a:blip r:embed="rId3"/>
+          <a:stretch>
+            <a:fillRect/>
+          </a:stretch>
+        </p:blipFill>
+        <p:spPr>
+          <a:xfrm>
+            <a:off x="679513" y="1875470"/>
+            <a:ext cx="10829926" cy="4071375"/>
+          </a:xfrm>
+          <a:prstGeom prst="rect">
+            <a:avLst/>
+          </a:prstGeom>
+        </p:spPr>
+      </p:pic>
     </p:spTree>
   </p:cSld>
   <p:clrMapOvr>
@@ -5251,11 +3914,11 @@
           <a:bodyPr wrap="square" rtlCol="0" anchor="ctr"/>
           <a:lstStyle/>
           <a:p>
-            <a:pPr indent="0" marL="0">
+            <a:pPr marL="0" indent="0">
               <a:buNone/>
             </a:pPr>
             <a:r>
-              <a:rPr lang="en-US" sz="1100" b="1" spc="200" kern="0" dirty="0">
+              <a:rPr lang="en-US" sz="1100" b="1" kern="0" spc="200" dirty="0">
                 <a:solidFill>
                   <a:srgbClr val="C9A24B"/>
                 </a:solidFill>
@@ -5290,7 +3953,7 @@
           <a:bodyPr wrap="square" rtlCol="0" anchor="ctr"/>
           <a:lstStyle/>
           <a:p>
-            <a:pPr indent="0" marL="0">
+            <a:pPr marL="0" indent="0">
               <a:buNone/>
             </a:pPr>
             <a:r>
@@ -5308,570 +3971,6 @@
           </a:p>
         </p:txBody>
       </p:sp>
-      <p:graphicFrame>
-        <p:nvGraphicFramePr>
-          <p:cNvPr id="10" name="Table 0"/>
-          <p:cNvGraphicFramePr>
-            <a:graphicFrameLocks noGrp="1"/>
-          </p:cNvGraphicFramePr>
-          <p:nvPr>
-            <p:extLst>
-              <p:ext uri="{D42A27DB-BD31-4B8C-83A1-F6EECF244321}">
-                <p14:modId xmlns:p14="http://schemas.microsoft.com/office/powerpoint/2010/main" val="1579011935"/>
-              </p:ext>
-            </p:extLst>
-          </p:nvPr>
-        </p:nvGraphicFramePr>
-        <p:xfrm>
-          <a:off x="457200" y="1463040"/>
-          <a:ext cx="11247120" cy="4206240"/>
-        </p:xfrm>
-        <a:graphic>
-          <a:graphicData uri="http://schemas.openxmlformats.org/drawingml/2006/table">
-            <a:tbl>
-              <a:tblPr/>
-              <a:tblGrid>
-                <a:gridCol w="3200400"/>
-                <a:gridCol w="8046720"/>
-              </a:tblGrid>
-              <a:tr h="1051560">
-                <a:tc>
-                  <a:txBody>
-                    <a:bodyPr/>
-                    <a:lstStyle/>
-                    <a:p>
-                      <a:pPr indent="0" marL="0">
-                        <a:buNone/>
-                      </a:pPr>
-                      <a:r>
-                        <a:rPr lang="en-US" sz="1300" b="1" dirty="0">
-                          <a:solidFill>
-                            <a:srgbClr val="FFFFFF"/>
-                          </a:solidFill>
-                          <a:latin typeface="Calibri" pitchFamily="34" charset="0"/>
-                          <a:ea typeface="Calibri" pitchFamily="34" charset="-122"/>
-                          <a:cs typeface="Calibri" pitchFamily="34" charset="-120"/>
-                        </a:rPr>
-                        <a:t>Конфигурация</a:t>
-                      </a:r>
-                      <a:endParaRPr lang="en-US" sz="1300" dirty="0">
-                        <a:latin typeface="Calibri" charset="0"/>
-                        <a:ea typeface="Calibri" charset="0"/>
-                        <a:cs typeface="Calibri" charset="0"/>
-                      </a:endParaRPr>
-                    </a:p>
-                  </a:txBody>
-                  <a:tcPr marL="91440" marR="91440" marT="45720" marB="45720" anchor="t">
-                    <a:lnL w="9525" cap="flat" cmpd="sng" algn="ctr">
-                      <a:solidFill>
-                        <a:srgbClr val="AEB4C0"/>
-                      </a:solidFill>
-                      <a:prstDash val="solid"/>
-                      <a:round/>
-                      <a:headEnd type="none" w="med" len="med"/>
-                      <a:tailEnd type="none" w="med" len="med"/>
-                    </a:lnL>
-                    <a:lnR w="9525" cap="flat" cmpd="sng" algn="ctr">
-                      <a:solidFill>
-                        <a:srgbClr val="AEB4C0"/>
-                      </a:solidFill>
-                      <a:prstDash val="solid"/>
-                      <a:round/>
-                      <a:headEnd type="none" w="med" len="med"/>
-                      <a:tailEnd type="none" w="med" len="med"/>
-                    </a:lnR>
-                    <a:lnT w="9525" cap="flat" cmpd="sng" algn="ctr">
-                      <a:solidFill>
-                        <a:srgbClr val="AEB4C0"/>
-                      </a:solidFill>
-                      <a:prstDash val="solid"/>
-                      <a:round/>
-                      <a:headEnd type="none" w="med" len="med"/>
-                      <a:tailEnd type="none" w="med" len="med"/>
-                    </a:lnT>
-                    <a:lnB w="9525" cap="flat" cmpd="sng" algn="ctr">
-                      <a:solidFill>
-                        <a:srgbClr val="AEB4C0"/>
-                      </a:solidFill>
-                      <a:prstDash val="solid"/>
-                      <a:round/>
-                      <a:headEnd type="none" w="med" len="med"/>
-                      <a:tailEnd type="none" w="med" len="med"/>
-                    </a:lnB>
-                    <a:solidFill>
-                      <a:srgbClr val="1B2A4A"/>
-                    </a:solidFill>
-                  </a:tcPr>
-                </a:tc>
-                <a:tc>
-                  <a:txBody>
-                    <a:bodyPr/>
-                    <a:lstStyle/>
-                    <a:p>
-                      <a:pPr indent="0" marL="0">
-                        <a:buNone/>
-                      </a:pPr>
-                      <a:r>
-                        <a:rPr lang="en-US" sz="1300" b="1" dirty="0">
-                          <a:solidFill>
-                            <a:srgbClr val="FFFFFF"/>
-                          </a:solidFill>
-                          <a:latin typeface="Calibri" pitchFamily="34" charset="0"/>
-                          <a:ea typeface="Calibri" pitchFamily="34" charset="-122"/>
-                          <a:cs typeface="Calibri" pitchFamily="34" charset="-120"/>
-                        </a:rPr>
-                        <a:t>Назначение и функциональные возможности</a:t>
-                      </a:r>
-                      <a:endParaRPr lang="en-US" sz="1300" dirty="0">
-                        <a:latin typeface="Calibri" charset="0"/>
-                        <a:ea typeface="Calibri" charset="0"/>
-                        <a:cs typeface="Calibri" charset="0"/>
-                      </a:endParaRPr>
-                    </a:p>
-                  </a:txBody>
-                  <a:tcPr marL="91440" marR="91440" marT="45720" marB="45720" anchor="t">
-                    <a:lnL w="9525" cap="flat" cmpd="sng" algn="ctr">
-                      <a:solidFill>
-                        <a:srgbClr val="AEB4C0"/>
-                      </a:solidFill>
-                      <a:prstDash val="solid"/>
-                      <a:round/>
-                      <a:headEnd type="none" w="med" len="med"/>
-                      <a:tailEnd type="none" w="med" len="med"/>
-                    </a:lnL>
-                    <a:lnR w="9525" cap="flat" cmpd="sng" algn="ctr">
-                      <a:solidFill>
-                        <a:srgbClr val="AEB4C0"/>
-                      </a:solidFill>
-                      <a:prstDash val="solid"/>
-                      <a:round/>
-                      <a:headEnd type="none" w="med" len="med"/>
-                      <a:tailEnd type="none" w="med" len="med"/>
-                    </a:lnR>
-                    <a:lnT w="9525" cap="flat" cmpd="sng" algn="ctr">
-                      <a:solidFill>
-                        <a:srgbClr val="AEB4C0"/>
-                      </a:solidFill>
-                      <a:prstDash val="solid"/>
-                      <a:round/>
-                      <a:headEnd type="none" w="med" len="med"/>
-                      <a:tailEnd type="none" w="med" len="med"/>
-                    </a:lnT>
-                    <a:lnB w="9525" cap="flat" cmpd="sng" algn="ctr">
-                      <a:solidFill>
-                        <a:srgbClr val="AEB4C0"/>
-                      </a:solidFill>
-                      <a:prstDash val="solid"/>
-                      <a:round/>
-                      <a:headEnd type="none" w="med" len="med"/>
-                      <a:tailEnd type="none" w="med" len="med"/>
-                    </a:lnB>
-                    <a:solidFill>
-                      <a:srgbClr val="1B2A4A"/>
-                    </a:solidFill>
-                  </a:tcPr>
-                </a:tc>
-              </a:tr>
-              <a:tr h="1051560">
-                <a:tc>
-                  <a:txBody>
-                    <a:bodyPr/>
-                    <a:lstStyle/>
-                    <a:p>
-                      <a:pPr indent="0" marL="0">
-                        <a:buNone/>
-                      </a:pPr>
-                      <a:r>
-                        <a:rPr lang="en-US" sz="1300" dirty="0">
-                          <a:solidFill>
-                            <a:srgbClr val="000000"/>
-                          </a:solidFill>
-                          <a:latin typeface="Calibri" pitchFamily="34" charset="0"/>
-                          <a:ea typeface="Calibri" pitchFamily="34" charset="-122"/>
-                          <a:cs typeface="Calibri" pitchFamily="34" charset="-120"/>
-                        </a:rPr>
-                        <a:t>[Название 1]</a:t>
-                      </a:r>
-                      <a:endParaRPr lang="en-US" sz="1300" dirty="0">
-                        <a:latin typeface="Calibri" charset="0"/>
-                        <a:ea typeface="Calibri" charset="0"/>
-                        <a:cs typeface="Calibri" charset="0"/>
-                      </a:endParaRPr>
-                    </a:p>
-                  </a:txBody>
-                  <a:tcPr marL="91440" marR="91440" marT="45720" marB="45720" anchor="t">
-                    <a:lnL w="9525" cap="flat" cmpd="sng" algn="ctr">
-                      <a:solidFill>
-                        <a:srgbClr val="AEB4C0"/>
-                      </a:solidFill>
-                      <a:prstDash val="solid"/>
-                      <a:round/>
-                      <a:headEnd type="none" w="med" len="med"/>
-                      <a:tailEnd type="none" w="med" len="med"/>
-                    </a:lnL>
-                    <a:lnR w="9525" cap="flat" cmpd="sng" algn="ctr">
-                      <a:solidFill>
-                        <a:srgbClr val="AEB4C0"/>
-                      </a:solidFill>
-                      <a:prstDash val="solid"/>
-                      <a:round/>
-                      <a:headEnd type="none" w="med" len="med"/>
-                      <a:tailEnd type="none" w="med" len="med"/>
-                    </a:lnR>
-                    <a:lnT w="9525" cap="flat" cmpd="sng" algn="ctr">
-                      <a:solidFill>
-                        <a:srgbClr val="AEB4C0"/>
-                      </a:solidFill>
-                      <a:prstDash val="solid"/>
-                      <a:round/>
-                      <a:headEnd type="none" w="med" len="med"/>
-                      <a:tailEnd type="none" w="med" len="med"/>
-                    </a:lnT>
-                    <a:lnB w="9525" cap="flat" cmpd="sng" algn="ctr">
-                      <a:solidFill>
-                        <a:srgbClr val="AEB4C0"/>
-                      </a:solidFill>
-                      <a:prstDash val="solid"/>
-                      <a:round/>
-                      <a:headEnd type="none" w="med" len="med"/>
-                      <a:tailEnd type="none" w="med" len="med"/>
-                    </a:lnB>
-                  </a:tcPr>
-                </a:tc>
-                <a:tc>
-                  <a:txBody>
-                    <a:bodyPr/>
-                    <a:lstStyle/>
-                    <a:p>
-                      <a:pPr indent="0" marL="0">
-                        <a:buNone/>
-                      </a:pPr>
-                      <a:r>
-                        <a:rPr lang="en-US" sz="1300" dirty="0">
-                          <a:solidFill>
-                            <a:srgbClr val="000000"/>
-                          </a:solidFill>
-                          <a:latin typeface="Calibri" pitchFamily="34" charset="0"/>
-                          <a:ea typeface="Calibri" pitchFamily="34" charset="-122"/>
-                          <a:cs typeface="Calibri" pitchFamily="34" charset="-120"/>
-                        </a:rPr>
-                        <a:t>[Описание]</a:t>
-                      </a:r>
-                      <a:endParaRPr lang="en-US" sz="1300" dirty="0">
-                        <a:latin typeface="Calibri" charset="0"/>
-                        <a:ea typeface="Calibri" charset="0"/>
-                        <a:cs typeface="Calibri" charset="0"/>
-                      </a:endParaRPr>
-                    </a:p>
-                  </a:txBody>
-                  <a:tcPr marL="91440" marR="91440" marT="45720" marB="45720" anchor="t">
-                    <a:lnL w="9525" cap="flat" cmpd="sng" algn="ctr">
-                      <a:solidFill>
-                        <a:srgbClr val="AEB4C0"/>
-                      </a:solidFill>
-                      <a:prstDash val="solid"/>
-                      <a:round/>
-                      <a:headEnd type="none" w="med" len="med"/>
-                      <a:tailEnd type="none" w="med" len="med"/>
-                    </a:lnL>
-                    <a:lnR w="9525" cap="flat" cmpd="sng" algn="ctr">
-                      <a:solidFill>
-                        <a:srgbClr val="AEB4C0"/>
-                      </a:solidFill>
-                      <a:prstDash val="solid"/>
-                      <a:round/>
-                      <a:headEnd type="none" w="med" len="med"/>
-                      <a:tailEnd type="none" w="med" len="med"/>
-                    </a:lnR>
-                    <a:lnT w="9525" cap="flat" cmpd="sng" algn="ctr">
-                      <a:solidFill>
-                        <a:srgbClr val="AEB4C0"/>
-                      </a:solidFill>
-                      <a:prstDash val="solid"/>
-                      <a:round/>
-                      <a:headEnd type="none" w="med" len="med"/>
-                      <a:tailEnd type="none" w="med" len="med"/>
-                    </a:lnT>
-                    <a:lnB w="9525" cap="flat" cmpd="sng" algn="ctr">
-                      <a:solidFill>
-                        <a:srgbClr val="AEB4C0"/>
-                      </a:solidFill>
-                      <a:prstDash val="solid"/>
-                      <a:round/>
-                      <a:headEnd type="none" w="med" len="med"/>
-                      <a:tailEnd type="none" w="med" len="med"/>
-                    </a:lnB>
-                  </a:tcPr>
-                </a:tc>
-              </a:tr>
-              <a:tr h="1051560">
-                <a:tc>
-                  <a:txBody>
-                    <a:bodyPr/>
-                    <a:lstStyle/>
-                    <a:p>
-                      <a:pPr indent="0" marL="0">
-                        <a:buNone/>
-                      </a:pPr>
-                      <a:r>
-                        <a:rPr lang="en-US" sz="1300" dirty="0">
-                          <a:solidFill>
-                            <a:srgbClr val="000000"/>
-                          </a:solidFill>
-                          <a:latin typeface="Calibri" pitchFamily="34" charset="0"/>
-                          <a:ea typeface="Calibri" pitchFamily="34" charset="-122"/>
-                          <a:cs typeface="Calibri" pitchFamily="34" charset="-120"/>
-                        </a:rPr>
-                        <a:t>[Название 2]</a:t>
-                      </a:r>
-                      <a:endParaRPr lang="en-US" sz="1300" dirty="0">
-                        <a:latin typeface="Calibri" charset="0"/>
-                        <a:ea typeface="Calibri" charset="0"/>
-                        <a:cs typeface="Calibri" charset="0"/>
-                      </a:endParaRPr>
-                    </a:p>
-                  </a:txBody>
-                  <a:tcPr marL="91440" marR="91440" marT="45720" marB="45720" anchor="t">
-                    <a:lnL w="9525" cap="flat" cmpd="sng" algn="ctr">
-                      <a:solidFill>
-                        <a:srgbClr val="AEB4C0"/>
-                      </a:solidFill>
-                      <a:prstDash val="solid"/>
-                      <a:round/>
-                      <a:headEnd type="none" w="med" len="med"/>
-                      <a:tailEnd type="none" w="med" len="med"/>
-                    </a:lnL>
-                    <a:lnR w="9525" cap="flat" cmpd="sng" algn="ctr">
-                      <a:solidFill>
-                        <a:srgbClr val="AEB4C0"/>
-                      </a:solidFill>
-                      <a:prstDash val="solid"/>
-                      <a:round/>
-                      <a:headEnd type="none" w="med" len="med"/>
-                      <a:tailEnd type="none" w="med" len="med"/>
-                    </a:lnR>
-                    <a:lnT w="9525" cap="flat" cmpd="sng" algn="ctr">
-                      <a:solidFill>
-                        <a:srgbClr val="AEB4C0"/>
-                      </a:solidFill>
-                      <a:prstDash val="solid"/>
-                      <a:round/>
-                      <a:headEnd type="none" w="med" len="med"/>
-                      <a:tailEnd type="none" w="med" len="med"/>
-                    </a:lnT>
-                    <a:lnB w="9525" cap="flat" cmpd="sng" algn="ctr">
-                      <a:solidFill>
-                        <a:srgbClr val="AEB4C0"/>
-                      </a:solidFill>
-                      <a:prstDash val="solid"/>
-                      <a:round/>
-                      <a:headEnd type="none" w="med" len="med"/>
-                      <a:tailEnd type="none" w="med" len="med"/>
-                    </a:lnB>
-                  </a:tcPr>
-                </a:tc>
-                <a:tc>
-                  <a:txBody>
-                    <a:bodyPr/>
-                    <a:lstStyle/>
-                    <a:p>
-                      <a:pPr indent="0" marL="0">
-                        <a:buNone/>
-                      </a:pPr>
-                      <a:r>
-                        <a:rPr lang="en-US" sz="1300" dirty="0">
-                          <a:solidFill>
-                            <a:srgbClr val="000000"/>
-                          </a:solidFill>
-                          <a:latin typeface="Calibri" pitchFamily="34" charset="0"/>
-                          <a:ea typeface="Calibri" pitchFamily="34" charset="-122"/>
-                          <a:cs typeface="Calibri" pitchFamily="34" charset="-120"/>
-                        </a:rPr>
-                        <a:t>[Описание]</a:t>
-                      </a:r>
-                      <a:endParaRPr lang="en-US" sz="1300" dirty="0">
-                        <a:latin typeface="Calibri" charset="0"/>
-                        <a:ea typeface="Calibri" charset="0"/>
-                        <a:cs typeface="Calibri" charset="0"/>
-                      </a:endParaRPr>
-                    </a:p>
-                  </a:txBody>
-                  <a:tcPr marL="91440" marR="91440" marT="45720" marB="45720" anchor="t">
-                    <a:lnL w="9525" cap="flat" cmpd="sng" algn="ctr">
-                      <a:solidFill>
-                        <a:srgbClr val="AEB4C0"/>
-                      </a:solidFill>
-                      <a:prstDash val="solid"/>
-                      <a:round/>
-                      <a:headEnd type="none" w="med" len="med"/>
-                      <a:tailEnd type="none" w="med" len="med"/>
-                    </a:lnL>
-                    <a:lnR w="9525" cap="flat" cmpd="sng" algn="ctr">
-                      <a:solidFill>
-                        <a:srgbClr val="AEB4C0"/>
-                      </a:solidFill>
-                      <a:prstDash val="solid"/>
-                      <a:round/>
-                      <a:headEnd type="none" w="med" len="med"/>
-                      <a:tailEnd type="none" w="med" len="med"/>
-                    </a:lnR>
-                    <a:lnT w="9525" cap="flat" cmpd="sng" algn="ctr">
-                      <a:solidFill>
-                        <a:srgbClr val="AEB4C0"/>
-                      </a:solidFill>
-                      <a:prstDash val="solid"/>
-                      <a:round/>
-                      <a:headEnd type="none" w="med" len="med"/>
-                      <a:tailEnd type="none" w="med" len="med"/>
-                    </a:lnT>
-                    <a:lnB w="9525" cap="flat" cmpd="sng" algn="ctr">
-                      <a:solidFill>
-                        <a:srgbClr val="AEB4C0"/>
-                      </a:solidFill>
-                      <a:prstDash val="solid"/>
-                      <a:round/>
-                      <a:headEnd type="none" w="med" len="med"/>
-                      <a:tailEnd type="none" w="med" len="med"/>
-                    </a:lnB>
-                  </a:tcPr>
-                </a:tc>
-              </a:tr>
-              <a:tr h="1051560">
-                <a:tc>
-                  <a:txBody>
-                    <a:bodyPr/>
-                    <a:lstStyle/>
-                    <a:p>
-                      <a:pPr indent="0" marL="0">
-                        <a:buNone/>
-                      </a:pPr>
-                      <a:r>
-                        <a:rPr lang="en-US" sz="1300" dirty="0">
-                          <a:solidFill>
-                            <a:srgbClr val="000000"/>
-                          </a:solidFill>
-                          <a:latin typeface="Calibri" pitchFamily="34" charset="0"/>
-                          <a:ea typeface="Calibri" pitchFamily="34" charset="-122"/>
-                          <a:cs typeface="Calibri" pitchFamily="34" charset="-120"/>
-                        </a:rPr>
-                        <a:t>[Название 3]</a:t>
-                      </a:r>
-                      <a:endParaRPr lang="en-US" sz="1300" dirty="0">
-                        <a:latin typeface="Calibri" charset="0"/>
-                        <a:ea typeface="Calibri" charset="0"/>
-                        <a:cs typeface="Calibri" charset="0"/>
-                      </a:endParaRPr>
-                    </a:p>
-                  </a:txBody>
-                  <a:tcPr marL="91440" marR="91440" marT="45720" marB="45720" anchor="t">
-                    <a:lnL w="9525" cap="flat" cmpd="sng" algn="ctr">
-                      <a:solidFill>
-                        <a:srgbClr val="AEB4C0"/>
-                      </a:solidFill>
-                      <a:prstDash val="solid"/>
-                      <a:round/>
-                      <a:headEnd type="none" w="med" len="med"/>
-                      <a:tailEnd type="none" w="med" len="med"/>
-                    </a:lnL>
-                    <a:lnR w="9525" cap="flat" cmpd="sng" algn="ctr">
-                      <a:solidFill>
-                        <a:srgbClr val="AEB4C0"/>
-                      </a:solidFill>
-                      <a:prstDash val="solid"/>
-                      <a:round/>
-                      <a:headEnd type="none" w="med" len="med"/>
-                      <a:tailEnd type="none" w="med" len="med"/>
-                    </a:lnR>
-                    <a:lnT w="9525" cap="flat" cmpd="sng" algn="ctr">
-                      <a:solidFill>
-                        <a:srgbClr val="AEB4C0"/>
-                      </a:solidFill>
-                      <a:prstDash val="solid"/>
-                      <a:round/>
-                      <a:headEnd type="none" w="med" len="med"/>
-                      <a:tailEnd type="none" w="med" len="med"/>
-                    </a:lnT>
-                    <a:lnB w="9525" cap="flat" cmpd="sng" algn="ctr">
-                      <a:solidFill>
-                        <a:srgbClr val="AEB4C0"/>
-                      </a:solidFill>
-                      <a:prstDash val="solid"/>
-                      <a:round/>
-                      <a:headEnd type="none" w="med" len="med"/>
-                      <a:tailEnd type="none" w="med" len="med"/>
-                    </a:lnB>
-                  </a:tcPr>
-                </a:tc>
-                <a:tc>
-                  <a:txBody>
-                    <a:bodyPr/>
-                    <a:lstStyle/>
-                    <a:p>
-                      <a:pPr indent="0" marL="0">
-                        <a:buNone/>
-                      </a:pPr>
-                      <a:r>
-                        <a:rPr lang="en-US" sz="1300" dirty="0">
-                          <a:solidFill>
-                            <a:srgbClr val="000000"/>
-                          </a:solidFill>
-                          <a:latin typeface="Calibri" pitchFamily="34" charset="0"/>
-                          <a:ea typeface="Calibri" pitchFamily="34" charset="-122"/>
-                          <a:cs typeface="Calibri" pitchFamily="34" charset="-120"/>
-                        </a:rPr>
-                        <a:t>[Описание]</a:t>
-                      </a:r>
-                      <a:endParaRPr lang="en-US" sz="1300" dirty="0">
-                        <a:latin typeface="Calibri" charset="0"/>
-                        <a:ea typeface="Calibri" charset="0"/>
-                        <a:cs typeface="Calibri" charset="0"/>
-                      </a:endParaRPr>
-                    </a:p>
-                  </a:txBody>
-                  <a:tcPr marL="91440" marR="91440" marT="45720" marB="45720" anchor="t">
-                    <a:lnL w="9525" cap="flat" cmpd="sng" algn="ctr">
-                      <a:solidFill>
-                        <a:srgbClr val="AEB4C0"/>
-                      </a:solidFill>
-                      <a:prstDash val="solid"/>
-                      <a:round/>
-                      <a:headEnd type="none" w="med" len="med"/>
-                      <a:tailEnd type="none" w="med" len="med"/>
-                    </a:lnL>
-                    <a:lnR w="9525" cap="flat" cmpd="sng" algn="ctr">
-                      <a:solidFill>
-                        <a:srgbClr val="AEB4C0"/>
-                      </a:solidFill>
-                      <a:prstDash val="solid"/>
-                      <a:round/>
-                      <a:headEnd type="none" w="med" len="med"/>
-                      <a:tailEnd type="none" w="med" len="med"/>
-                    </a:lnR>
-                    <a:lnT w="9525" cap="flat" cmpd="sng" algn="ctr">
-                      <a:solidFill>
-                        <a:srgbClr val="AEB4C0"/>
-                      </a:solidFill>
-                      <a:prstDash val="solid"/>
-                      <a:round/>
-                      <a:headEnd type="none" w="med" len="med"/>
-                      <a:tailEnd type="none" w="med" len="med"/>
-                    </a:lnT>
-                    <a:lnB w="9525" cap="flat" cmpd="sng" algn="ctr">
-                      <a:solidFill>
-                        <a:srgbClr val="AEB4C0"/>
-                      </a:solidFill>
-                      <a:prstDash val="solid"/>
-                      <a:round/>
-                      <a:headEnd type="none" w="med" len="med"/>
-                      <a:tailEnd type="none" w="med" len="med"/>
-                    </a:lnB>
-                  </a:tcPr>
-                </a:tc>
-              </a:tr>
-            </a:tbl>
-          </a:graphicData>
-        </a:graphic>
-      </p:graphicFrame>
       <p:sp>
         <p:nvSpPr>
           <p:cNvPr id="6" name="Text 3"/>
@@ -5893,7 +3992,7 @@
           <a:bodyPr wrap="square" rtlCol="0" anchor="ctr"/>
           <a:lstStyle/>
           <a:p>
-            <a:pPr indent="0" marL="0">
+            <a:pPr marL="0" indent="0">
               <a:buNone/>
             </a:pPr>
             <a:r>
@@ -5932,7 +4031,7 @@
           <a:bodyPr wrap="square" rtlCol="0" anchor="ctr"/>
           <a:lstStyle/>
           <a:p>
-            <a:pPr algn="r" indent="0" marL="0">
+            <a:pPr marL="0" indent="0" algn="r">
               <a:buNone/>
             </a:pPr>
             <a:r>
@@ -5947,6 +4046,181 @@
               <a:t>9</a:t>
             </a:r>
             <a:endParaRPr lang="en-US" sz="900" dirty="0"/>
+          </a:p>
+        </p:txBody>
+      </p:sp>
+      <p:sp>
+        <p:nvSpPr>
+          <p:cNvPr id="5" name="TextBox 4">
+            <a:extLst>
+              <a:ext uri="{FF2B5EF4-FFF2-40B4-BE49-F238E27FC236}">
+                <a16:creationId xmlns:a16="http://schemas.microsoft.com/office/drawing/2014/main" id="{B211248B-65AC-72F2-7B89-0AC7D9567ABA}"/>
+              </a:ext>
+            </a:extLst>
+          </p:cNvPr>
+          <p:cNvSpPr txBox="1"/>
+          <p:nvPr/>
+        </p:nvSpPr>
+        <p:spPr>
+          <a:xfrm>
+            <a:off x="457200" y="1500188"/>
+            <a:ext cx="9513245" cy="4708981"/>
+          </a:xfrm>
+          <a:prstGeom prst="rect">
+            <a:avLst/>
+          </a:prstGeom>
+          <a:noFill/>
+        </p:spPr>
+        <p:txBody>
+          <a:bodyPr wrap="none" rtlCol="0">
+            <a:spAutoFit/>
+          </a:bodyPr>
+          <a:lstStyle/>
+          <a:p>
+            <a:pPr algn="just"/>
+            <a:r>
+              <a:rPr lang="ru-RU" sz="2000" dirty="0"/>
+              <a:t>1)</a:t>
+            </a:r>
+            <a:r>
+              <a:rPr lang="en-US" sz="2000" dirty="0"/>
+              <a:t> </a:t>
+            </a:r>
+            <a:r>
+              <a:rPr lang="ru-RU" sz="2000" dirty="0"/>
+              <a:t>1С:Зарплата и управление персоналом - Это специализированное решение от</a:t>
+            </a:r>
+          </a:p>
+          <a:p>
+            <a:pPr algn="just"/>
+            <a:r>
+              <a:rPr lang="ru-RU" sz="2000" dirty="0"/>
+              <a:t>фирмы "1С" для автоматизации кадрового учёта, расчёта заработной платы,</a:t>
+            </a:r>
+          </a:p>
+          <a:p>
+            <a:pPr algn="just"/>
+            <a:r>
+              <a:rPr lang="ru-RU" sz="2000" dirty="0"/>
+              <a:t>управления персоналом и подготовки отчётности в соответствии с</a:t>
+            </a:r>
+          </a:p>
+          <a:p>
+            <a:pPr algn="just"/>
+            <a:r>
+              <a:rPr lang="ru-RU" sz="2000" dirty="0"/>
+              <a:t>законодательством РФ.</a:t>
+            </a:r>
+          </a:p>
+          <a:p>
+            <a:pPr algn="just"/>
+            <a:r>
+              <a:rPr lang="ru-RU" sz="2000" dirty="0"/>
+              <a:t>2)</a:t>
+            </a:r>
+            <a:r>
+              <a:rPr lang="en-US" sz="2000" dirty="0"/>
+              <a:t> </a:t>
+            </a:r>
+            <a:r>
+              <a:rPr lang="ru-RU" sz="2000" dirty="0"/>
+              <a:t>1С:Управление производственным предприятием (УПП) - Специализированное</a:t>
+            </a:r>
+          </a:p>
+          <a:p>
+            <a:pPr algn="just"/>
+            <a:r>
+              <a:rPr lang="ru-RU" sz="2000" dirty="0"/>
+              <a:t>решение для автоматизации управления производственными процессами,</a:t>
+            </a:r>
+          </a:p>
+          <a:p>
+            <a:pPr algn="just"/>
+            <a:r>
+              <a:rPr lang="ru-RU" sz="2000" dirty="0"/>
+              <a:t>ресурсами и финансами на промышленных предприятиях.</a:t>
+            </a:r>
+          </a:p>
+          <a:p>
+            <a:pPr algn="just"/>
+            <a:r>
+              <a:rPr lang="ru-RU" sz="2000" dirty="0"/>
+              <a:t>3)</a:t>
+            </a:r>
+            <a:r>
+              <a:rPr lang="en-US" sz="2000" dirty="0"/>
+              <a:t> </a:t>
+            </a:r>
+            <a:r>
+              <a:rPr lang="ru-RU" sz="2000" dirty="0"/>
+              <a:t>1С:CRM - Система управления взаимоотношениями с клиентами (Customer</a:t>
+            </a:r>
+          </a:p>
+          <a:p>
+            <a:pPr algn="just"/>
+            <a:r>
+              <a:rPr lang="ru-RU" sz="2000" dirty="0" err="1"/>
+              <a:t>Relationship</a:t>
+            </a:r>
+            <a:r>
+              <a:rPr lang="ru-RU" sz="2000" dirty="0"/>
+              <a:t> Management), предназначенная для автоматизации продаж, маркетинга</a:t>
+            </a:r>
+          </a:p>
+          <a:p>
+            <a:pPr algn="just"/>
+            <a:r>
+              <a:rPr lang="ru-RU" sz="2000" dirty="0"/>
+              <a:t>и сервисного обслуживания.</a:t>
+            </a:r>
+          </a:p>
+          <a:p>
+            <a:pPr algn="just"/>
+            <a:r>
+              <a:rPr lang="ru-RU" sz="2000" dirty="0"/>
+              <a:t>4)</a:t>
+            </a:r>
+            <a:r>
+              <a:rPr lang="en-US" sz="2000" dirty="0"/>
+              <a:t> </a:t>
+            </a:r>
+            <a:r>
+              <a:rPr lang="ru-RU" sz="2000" dirty="0"/>
+              <a:t>1С:ERP - Комплексная ERP-система (Enterprise Resource Planning) для управления</a:t>
+            </a:r>
+          </a:p>
+          <a:p>
+            <a:pPr algn="just"/>
+            <a:r>
+              <a:rPr lang="ru-RU" sz="2000" dirty="0"/>
+              <a:t>всеми бизнес-процессами предприятия.</a:t>
+            </a:r>
+          </a:p>
+          <a:p>
+            <a:pPr algn="just"/>
+            <a:r>
+              <a:rPr lang="ru-RU" sz="2000" dirty="0"/>
+              <a:t>5)</a:t>
+            </a:r>
+            <a:r>
+              <a:rPr lang="en-US" sz="2000" dirty="0"/>
+              <a:t> </a:t>
+            </a:r>
+            <a:r>
+              <a:rPr lang="ru-RU" sz="2000" dirty="0"/>
+              <a:t>1С:Документооборот - Система электронного документооборота (СЭД) для</a:t>
+            </a:r>
+          </a:p>
+          <a:p>
+            <a:pPr algn="just"/>
+            <a:r>
+              <a:rPr lang="ru-RU" sz="2000" dirty="0"/>
+              <a:t>организации работы с корпоративными документами.</a:t>
+            </a:r>
+          </a:p>
+          <a:p>
+            <a:pPr algn="just"/>
+            <a:endParaRPr lang="ru-RU" sz="2000" dirty="0"/>
           </a:p>
         </p:txBody>
       </p:sp>
@@ -6251,4 +4525,319 @@
     </a:ext>
   </a:extLst>
 </a:theme>
+</file>
+
+<file path=ppt/theme/theme2.xml><?xml version="1.0" encoding="utf-8"?>
+<a:theme xmlns:a="http://schemas.openxmlformats.org/drawingml/2006/main" name="Тема Office">
+  <a:themeElements>
+    <a:clrScheme name="Стандартная">
+      <a:dk1>
+        <a:sysClr val="windowText" lastClr="000000"/>
+      </a:dk1>
+      <a:lt1>
+        <a:sysClr val="window" lastClr="FFFFFF"/>
+      </a:lt1>
+      <a:dk2>
+        <a:srgbClr val="0E2841"/>
+      </a:dk2>
+      <a:lt2>
+        <a:srgbClr val="E8E8E8"/>
+      </a:lt2>
+      <a:accent1>
+        <a:srgbClr val="156082"/>
+      </a:accent1>
+      <a:accent2>
+        <a:srgbClr val="E97132"/>
+      </a:accent2>
+      <a:accent3>
+        <a:srgbClr val="196B24"/>
+      </a:accent3>
+      <a:accent4>
+        <a:srgbClr val="0F9ED5"/>
+      </a:accent4>
+      <a:accent5>
+        <a:srgbClr val="A02B93"/>
+      </a:accent5>
+      <a:accent6>
+        <a:srgbClr val="4EA72E"/>
+      </a:accent6>
+      <a:hlink>
+        <a:srgbClr val="467886"/>
+      </a:hlink>
+      <a:folHlink>
+        <a:srgbClr val="96607D"/>
+      </a:folHlink>
+    </a:clrScheme>
+    <a:fontScheme name="Стандартная">
+      <a:majorFont>
+        <a:latin typeface="Aptos Display" panose="02110004020202020204"/>
+        <a:ea typeface=""/>
+        <a:cs typeface=""/>
+        <a:font script="Jpan" typeface="游ゴシック Light"/>
+        <a:font script="Hang" typeface="맑은 고딕"/>
+        <a:font script="Hans" typeface="等线 Light"/>
+        <a:font script="Hant" typeface="新細明體"/>
+        <a:font script="Arab" typeface="Times New Roman"/>
+        <a:font script="Hebr" typeface="Times New Roman"/>
+        <a:font script="Thai" typeface="Angsana New"/>
+        <a:font script="Ethi" typeface="Nyala"/>
+        <a:font script="Beng" typeface="Vrinda"/>
+        <a:font script="Gujr" typeface="Shruti"/>
+        <a:font script="Khmr" typeface="MoolBoran"/>
+        <a:font script="Knda" typeface="Tunga"/>
+        <a:font script="Guru" typeface="Raavi"/>
+        <a:font script="Cans" typeface="Euphemia"/>
+        <a:font script="Cher" typeface="Plantagenet Cherokee"/>
+        <a:font script="Yiii" typeface="Microsoft Yi Baiti"/>
+        <a:font script="Tibt" typeface="Microsoft Himalaya"/>
+        <a:font script="Thaa" typeface="MV Boli"/>
+        <a:font script="Deva" typeface="Mangal"/>
+        <a:font script="Telu" typeface="Gautami"/>
+        <a:font script="Taml" typeface="Latha"/>
+        <a:font script="Syrc" typeface="Estrangelo Edessa"/>
+        <a:font script="Orya" typeface="Kalinga"/>
+        <a:font script="Mlym" typeface="Kartika"/>
+        <a:font script="Laoo" typeface="DokChampa"/>
+        <a:font script="Sinh" typeface="Iskoola Pota"/>
+        <a:font script="Mong" typeface="Mongolian Baiti"/>
+        <a:font script="Viet" typeface="Times New Roman"/>
+        <a:font script="Uigh" typeface="Microsoft Uighur"/>
+        <a:font script="Geor" typeface="Sylfaen"/>
+        <a:font script="Armn" typeface="Arial"/>
+        <a:font script="Bugi" typeface="Leelawadee UI"/>
+        <a:font script="Bopo" typeface="Microsoft JhengHei"/>
+        <a:font script="Java" typeface="Javanese Text"/>
+        <a:font script="Lisu" typeface="Segoe UI"/>
+        <a:font script="Mymr" typeface="Myanmar Text"/>
+        <a:font script="Nkoo" typeface="Ebrima"/>
+        <a:font script="Olck" typeface="Nirmala UI"/>
+        <a:font script="Osma" typeface="Ebrima"/>
+        <a:font script="Phag" typeface="Phagspa"/>
+        <a:font script="Syrn" typeface="Estrangelo Edessa"/>
+        <a:font script="Syrj" typeface="Estrangelo Edessa"/>
+        <a:font script="Syre" typeface="Estrangelo Edessa"/>
+        <a:font script="Sora" typeface="Nirmala UI"/>
+        <a:font script="Tale" typeface="Microsoft Tai Le"/>
+        <a:font script="Talu" typeface="Microsoft New Tai Lue"/>
+        <a:font script="Tfng" typeface="Ebrima"/>
+      </a:majorFont>
+      <a:minorFont>
+        <a:latin typeface="Aptos" panose="02110004020202020204"/>
+        <a:ea typeface=""/>
+        <a:cs typeface=""/>
+        <a:font script="Jpan" typeface="游ゴシック"/>
+        <a:font script="Hang" typeface="맑은 고딕"/>
+        <a:font script="Hans" typeface="等线"/>
+        <a:font script="Hant" typeface="新細明體"/>
+        <a:font script="Arab" typeface="Arial"/>
+        <a:font script="Hebr" typeface="Arial"/>
+        <a:font script="Thai" typeface="Cordia New"/>
+        <a:font script="Ethi" typeface="Nyala"/>
+        <a:font script="Beng" typeface="Vrinda"/>
+        <a:font script="Gujr" typeface="Shruti"/>
+        <a:font script="Khmr" typeface="DaunPenh"/>
+        <a:font script="Knda" typeface="Tunga"/>
+        <a:font script="Guru" typeface="Raavi"/>
+        <a:font script="Cans" typeface="Euphemia"/>
+        <a:font script="Cher" typeface="Plantagenet Cherokee"/>
+        <a:font script="Yiii" typeface="Microsoft Yi Baiti"/>
+        <a:font script="Tibt" typeface="Microsoft Himalaya"/>
+        <a:font script="Thaa" typeface="MV Boli"/>
+        <a:font script="Deva" typeface="Mangal"/>
+        <a:font script="Telu" typeface="Gautami"/>
+        <a:font script="Taml" typeface="Latha"/>
+        <a:font script="Syrc" typeface="Estrangelo Edessa"/>
+        <a:font script="Orya" typeface="Kalinga"/>
+        <a:font script="Mlym" typeface="Kartika"/>
+        <a:font script="Laoo" typeface="DokChampa"/>
+        <a:font script="Sinh" typeface="Iskoola Pota"/>
+        <a:font script="Mong" typeface="Mongolian Baiti"/>
+        <a:font script="Viet" typeface="Arial"/>
+        <a:font script="Uigh" typeface="Microsoft Uighur"/>
+        <a:font script="Geor" typeface="Sylfaen"/>
+        <a:font script="Armn" typeface="Arial"/>
+        <a:font script="Bugi" typeface="Leelawadee UI"/>
+        <a:font script="Bopo" typeface="Microsoft JhengHei"/>
+        <a:font script="Java" typeface="Javanese Text"/>
+        <a:font script="Lisu" typeface="Segoe UI"/>
+        <a:font script="Mymr" typeface="Myanmar Text"/>
+        <a:font script="Nkoo" typeface="Ebrima"/>
+        <a:font script="Olck" typeface="Nirmala UI"/>
+        <a:font script="Osma" typeface="Ebrima"/>
+        <a:font script="Phag" typeface="Phagspa"/>
+        <a:font script="Syrn" typeface="Estrangelo Edessa"/>
+        <a:font script="Syrj" typeface="Estrangelo Edessa"/>
+        <a:font script="Syre" typeface="Estrangelo Edessa"/>
+        <a:font script="Sora" typeface="Nirmala UI"/>
+        <a:font script="Tale" typeface="Microsoft Tai Le"/>
+        <a:font script="Talu" typeface="Microsoft New Tai Lue"/>
+        <a:font script="Tfng" typeface="Ebrima"/>
+      </a:minorFont>
+    </a:fontScheme>
+    <a:fmtScheme name="Стандартная">
+      <a:fillStyleLst>
+        <a:solidFill>
+          <a:schemeClr val="phClr"/>
+        </a:solidFill>
+        <a:gradFill rotWithShape="1">
+          <a:gsLst>
+            <a:gs pos="0">
+              <a:schemeClr val="phClr">
+                <a:lumMod val="110000"/>
+                <a:satMod val="105000"/>
+                <a:tint val="67000"/>
+              </a:schemeClr>
+            </a:gs>
+            <a:gs pos="50000">
+              <a:schemeClr val="phClr">
+                <a:lumMod val="105000"/>
+                <a:satMod val="103000"/>
+                <a:tint val="73000"/>
+              </a:schemeClr>
+            </a:gs>
+            <a:gs pos="100000">
+              <a:schemeClr val="phClr">
+                <a:lumMod val="105000"/>
+                <a:satMod val="109000"/>
+                <a:tint val="81000"/>
+              </a:schemeClr>
+            </a:gs>
+          </a:gsLst>
+          <a:lin ang="5400000" scaled="0"/>
+        </a:gradFill>
+        <a:gradFill rotWithShape="1">
+          <a:gsLst>
+            <a:gs pos="0">
+              <a:schemeClr val="phClr">
+                <a:satMod val="103000"/>
+                <a:lumMod val="102000"/>
+                <a:tint val="94000"/>
+              </a:schemeClr>
+            </a:gs>
+            <a:gs pos="50000">
+              <a:schemeClr val="phClr">
+                <a:satMod val="110000"/>
+                <a:lumMod val="100000"/>
+                <a:shade val="100000"/>
+              </a:schemeClr>
+            </a:gs>
+            <a:gs pos="100000">
+              <a:schemeClr val="phClr">
+                <a:lumMod val="99000"/>
+                <a:satMod val="120000"/>
+                <a:shade val="78000"/>
+              </a:schemeClr>
+            </a:gs>
+          </a:gsLst>
+          <a:lin ang="5400000" scaled="0"/>
+        </a:gradFill>
+      </a:fillStyleLst>
+      <a:lnStyleLst>
+        <a:ln w="12700" cap="flat" cmpd="sng" algn="ctr">
+          <a:solidFill>
+            <a:schemeClr val="phClr"/>
+          </a:solidFill>
+          <a:prstDash val="solid"/>
+          <a:miter lim="800000"/>
+        </a:ln>
+        <a:ln w="19050" cap="flat" cmpd="sng" algn="ctr">
+          <a:solidFill>
+            <a:schemeClr val="phClr"/>
+          </a:solidFill>
+          <a:prstDash val="solid"/>
+          <a:miter lim="800000"/>
+        </a:ln>
+        <a:ln w="25400" cap="flat" cmpd="sng" algn="ctr">
+          <a:solidFill>
+            <a:schemeClr val="phClr"/>
+          </a:solidFill>
+          <a:prstDash val="solid"/>
+          <a:miter lim="800000"/>
+        </a:ln>
+      </a:lnStyleLst>
+      <a:effectStyleLst>
+        <a:effectStyle>
+          <a:effectLst/>
+        </a:effectStyle>
+        <a:effectStyle>
+          <a:effectLst/>
+        </a:effectStyle>
+        <a:effectStyle>
+          <a:effectLst>
+            <a:outerShdw blurRad="57150" dist="19050" dir="5400000" algn="ctr" rotWithShape="0">
+              <a:srgbClr val="000000">
+                <a:alpha val="63000"/>
+              </a:srgbClr>
+            </a:outerShdw>
+          </a:effectLst>
+        </a:effectStyle>
+      </a:effectStyleLst>
+      <a:bgFillStyleLst>
+        <a:solidFill>
+          <a:schemeClr val="phClr"/>
+        </a:solidFill>
+        <a:solidFill>
+          <a:schemeClr val="phClr">
+            <a:tint val="95000"/>
+            <a:satMod val="170000"/>
+          </a:schemeClr>
+        </a:solidFill>
+        <a:gradFill rotWithShape="1">
+          <a:gsLst>
+            <a:gs pos="0">
+              <a:schemeClr val="phClr">
+                <a:tint val="93000"/>
+                <a:satMod val="150000"/>
+                <a:shade val="98000"/>
+                <a:lumMod val="102000"/>
+              </a:schemeClr>
+            </a:gs>
+            <a:gs pos="50000">
+              <a:schemeClr val="phClr">
+                <a:tint val="98000"/>
+                <a:satMod val="130000"/>
+                <a:shade val="90000"/>
+                <a:lumMod val="103000"/>
+              </a:schemeClr>
+            </a:gs>
+            <a:gs pos="100000">
+              <a:schemeClr val="phClr">
+                <a:shade val="63000"/>
+                <a:satMod val="120000"/>
+              </a:schemeClr>
+            </a:gs>
+          </a:gsLst>
+          <a:lin ang="5400000" scaled="0"/>
+        </a:gradFill>
+      </a:bgFillStyleLst>
+    </a:fmtScheme>
+  </a:themeElements>
+  <a:objectDefaults>
+    <a:lnDef>
+      <a:spPr/>
+      <a:bodyPr/>
+      <a:lstStyle/>
+      <a:style>
+        <a:lnRef idx="2">
+          <a:schemeClr val="accent1"/>
+        </a:lnRef>
+        <a:fillRef idx="0">
+          <a:schemeClr val="accent1"/>
+        </a:fillRef>
+        <a:effectRef idx="1">
+          <a:schemeClr val="accent1"/>
+        </a:effectRef>
+        <a:fontRef idx="minor">
+          <a:schemeClr val="tx1"/>
+        </a:fontRef>
+      </a:style>
+    </a:lnDef>
+  </a:objectDefaults>
+  <a:extraClrSchemeLst/>
+  <a:extLst>
+    <a:ext uri="{05A4C25C-085E-4340-85A3-A5531E510DB2}">
+      <thm15:themeFamily xmlns:thm15="http://schemas.microsoft.com/office/thememl/2012/main" name="Office Theme" id="{2E142A2C-CD16-42D6-873A-C26D2A0506FA}" vid="{1BDDFF52-6CD6-40A5-AB3C-68EB2F1E4D0A}"/>
+    </a:ext>
+  </a:extLst>
+</a:theme>
 </file>